--- a/project_38_pavement_crack_detection/presentations/project_presentation.pptx
+++ b/project_38_pavement_crack_detection/presentations/project_presentation.pptx
@@ -13,6 +13,13 @@
     <p:sldId id="261" r:id="rId12"/>
     <p:sldId id="262" r:id="rId13"/>
     <p:sldId id="263" r:id="rId14"/>
+    <p:sldId id="264" r:id="rId15"/>
+    <p:sldId id="265" r:id="rId16"/>
+    <p:sldId id="266" r:id="rId17"/>
+    <p:sldId id="267" r:id="rId18"/>
+    <p:sldId id="268" r:id="rId19"/>
+    <p:sldId id="269" r:id="rId20"/>
+    <p:sldId id="270" r:id="rId21"/>
   </p:sldIdLst>
   <p:sldSz cx="12191695" cy="6858000" type="screen4x3"/>
   <p:notesSz cx="6858000" cy="9144000"/>
@@ -3146,8 +3153,8 @@
         </p:nvSpPr>
         <p:spPr>
           <a:xfrm>
-            <a:off x="1097280" y="1645920"/>
-            <a:ext cx="10058400" cy="3474720"/>
+            <a:off x="914400" y="1828800"/>
+            <a:ext cx="10362895" cy="3200400"/>
           </a:xfrm>
           <a:prstGeom prst="rect">
             <a:avLst/>
@@ -3163,12 +3170,31 @@
             <a:pPr>
               <a:defRPr sz="1400" b="1">
                 <a:solidFill>
-                  <a:srgbClr val="38BDF8"/>
-                </a:solidFill>
-              </a:defRPr>
-            </a:pPr>
-            <a:r>
-              <a:t>PROJECT 38 OF 55  •  RESEARCH &amp; IMPLEMENTATION DECK</a:t>
+                  <a:srgbClr val="F59E0B"/>
+                </a:solidFill>
+              </a:defRPr>
+            </a:pPr>
+            <a:r>
+              <a:t>COLLEGE CAPSTONE ENGINEERING PORTFOLIO • PROJECT-038</a:t>
+            </a:r>
+          </a:p>
+          <a:p>
+            <a:pPr>
+              <a:spcBef>
+                <a:spcPts val="1200"/>
+              </a:spcBef>
+              <a:defRPr sz="3600" b="1">
+                <a:solidFill>
+                  <a:srgbClr val="F8FAFC"/>
+                </a:solidFill>
+              </a:defRPr>
+            </a:pPr>
+            <a:r>
+              <a:t>Pavement Crack Detection &amp;</a:t>
+            </a:r>
+            <a:br/>
+            <a:r>
+              <a:t>ASTM D6433 Severity Assessment System</a:t>
             </a:r>
           </a:p>
           <a:p>
@@ -3176,29 +3202,1946 @@
               <a:spcBef>
                 <a:spcPts val="1400"/>
               </a:spcBef>
-              <a:defRPr sz="3200" b="1">
-                <a:solidFill>
-                  <a:srgbClr val="FFFFFF"/>
-                </a:solidFill>
-              </a:defRPr>
-            </a:pPr>
-            <a:r>
-              <a:t>PAVEMENT CRACK DETECTION AND SEVERITY ASSESSMENT USING DEEP LEARNING</a:t>
-            </a:r>
-          </a:p>
-          <a:p>
-            <a:pPr>
-              <a:spcBef>
-                <a:spcPts val="1200"/>
-              </a:spcBef>
-              <a:defRPr sz="1600">
-                <a:solidFill>
-                  <a:srgbClr val="CBD5E1"/>
-                </a:solidFill>
-              </a:defRPr>
-            </a:pPr>
-            <a:r>
-              <a:t>Enterprise-Grade AI Architecture, Machine Learning Pipeline &amp; Deployment Framework</a:t>
+              <a:defRPr sz="1500">
+                <a:solidFill>
+                  <a:srgbClr val="10B981"/>
+                </a:solidFill>
+              </a:defRPr>
+            </a:pPr>
+            <a:r>
+              <a:t>PyTorch ResUNet Semantic Segmentation · Dual-Head PCI Regressor · Automated Work Order Dispatch · Port 5038</a:t>
+            </a:r>
+          </a:p>
+        </p:txBody>
+      </p:sp>
+    </p:spTree>
+  </p:cSld>
+  <p:clrMapOvr>
+    <a:masterClrMapping/>
+  </p:clrMapOvr>
+</p:sld>
+</file>
+
+<file path=ppt/slides/slide10.xml><?xml version="1.0" encoding="utf-8"?>
+<p:sld xmlns:a="http://schemas.openxmlformats.org/drawingml/2006/main" xmlns:p="http://schemas.openxmlformats.org/presentationml/2006/main" xmlns:r="http://schemas.openxmlformats.org/officeDocument/2006/relationships">
+  <p:cSld>
+    <p:spTree>
+      <p:nvGrpSpPr>
+        <p:cNvPr id="1" name=""/>
+        <p:cNvGrpSpPr/>
+        <p:nvPr/>
+      </p:nvGrpSpPr>
+      <p:grpSpPr/>
+      <p:sp>
+        <p:nvSpPr>
+          <p:cNvPr id="2" name="Rectangle 1"/>
+          <p:cNvSpPr/>
+          <p:nvPr/>
+        </p:nvSpPr>
+        <p:spPr>
+          <a:xfrm>
+            <a:off x="0" y="0"/>
+            <a:ext cx="12191695" cy="6858000"/>
+          </a:xfrm>
+          <a:prstGeom prst="rect">
+            <a:avLst/>
+          </a:prstGeom>
+          <a:solidFill>
+            <a:srgbClr val="0F172A"/>
+          </a:solidFill>
+          <a:ln>
+            <a:noFill/>
+          </a:ln>
+        </p:spPr>
+        <p:style>
+          <a:lnRef idx="1">
+            <a:schemeClr val="accent1"/>
+          </a:lnRef>
+          <a:fillRef idx="3">
+            <a:schemeClr val="accent1"/>
+          </a:fillRef>
+          <a:effectRef idx="2">
+            <a:schemeClr val="accent1"/>
+          </a:effectRef>
+          <a:fontRef idx="minor">
+            <a:schemeClr val="lt1"/>
+          </a:fontRef>
+        </p:style>
+        <p:txBody>
+          <a:bodyPr rtlCol="0" anchor="ctr"/>
+          <a:lstStyle/>
+          <a:p>
+            <a:pPr algn="ctr"/>
+          </a:p>
+        </p:txBody>
+      </p:sp>
+      <p:sp>
+        <p:nvSpPr>
+          <p:cNvPr id="3" name="TextBox 2"/>
+          <p:cNvSpPr txBox="1"/>
+          <p:nvPr/>
+        </p:nvSpPr>
+        <p:spPr>
+          <a:xfrm>
+            <a:off x="731520" y="365760"/>
+            <a:ext cx="10728655" cy="1005840"/>
+          </a:xfrm>
+          <a:prstGeom prst="rect">
+            <a:avLst/>
+          </a:prstGeom>
+          <a:noFill/>
+        </p:spPr>
+        <p:txBody>
+          <a:bodyPr wrap="square">
+            <a:spAutoFit/>
+          </a:bodyPr>
+          <a:lstStyle/>
+          <a:p>
+            <a:pPr>
+              <a:defRPr sz="1100" b="1">
+                <a:solidFill>
+                  <a:srgbClr val="F59E0B"/>
+                </a:solidFill>
+              </a:defRPr>
+            </a:pPr>
+            <a:r>
+              <a:t>CIVIL INFRASTRUCTURE &amp; COMPUTER VISION • PROJECT-038</a:t>
+            </a:r>
+          </a:p>
+          <a:p>
+            <a:pPr>
+              <a:defRPr sz="2200" b="1">
+                <a:solidFill>
+                  <a:srgbClr val="F8FAFC"/>
+                </a:solidFill>
+              </a:defRPr>
+            </a:pPr>
+            <a:r>
+              <a:t>Highway Corridor Geofencing &amp; Chainage Tracking</a:t>
+            </a:r>
+          </a:p>
+        </p:txBody>
+      </p:sp>
+      <p:pic>
+        <p:nvPicPr>
+          <p:cNvPr id="4" name="Picture 3" descr="03_corridor_selection_highway.png"/>
+          <p:cNvPicPr>
+            <a:picLocks noChangeAspect="1"/>
+          </p:cNvPicPr>
+          <p:nvPr/>
+        </p:nvPicPr>
+        <p:blipFill>
+          <a:blip r:embed="rId2"/>
+          <a:stretch>
+            <a:fillRect/>
+          </a:stretch>
+        </p:blipFill>
+        <p:spPr>
+          <a:xfrm>
+            <a:off x="731520" y="1645920"/>
+            <a:ext cx="6217920" cy="4389120"/>
+          </a:xfrm>
+          <a:prstGeom prst="rect">
+            <a:avLst/>
+          </a:prstGeom>
+        </p:spPr>
+      </p:pic>
+      <p:sp>
+        <p:nvSpPr>
+          <p:cNvPr id="5" name="TextBox 4"/>
+          <p:cNvSpPr txBox="1"/>
+          <p:nvPr/>
+        </p:nvSpPr>
+        <p:spPr>
+          <a:xfrm>
+            <a:off x="731520" y="6080759"/>
+            <a:ext cx="6217920" cy="365760"/>
+          </a:xfrm>
+          <a:prstGeom prst="rect">
+            <a:avLst/>
+          </a:prstGeom>
+          <a:noFill/>
+        </p:spPr>
+        <p:txBody>
+          <a:bodyPr wrap="none">
+            <a:spAutoFit/>
+          </a:bodyPr>
+          <a:lstStyle/>
+          <a:p>
+            <a:pPr>
+              <a:defRPr sz="1000" i="1">
+                <a:solidFill>
+                  <a:srgbClr val="94A3B8"/>
+                </a:solidFill>
+              </a:defRPr>
+            </a:pPr>
+            <a:r>
+              <a:t>Figure 3: Selection of Interstate 80 Westbound with chainage marker 114.2 km and updated road audit telemetry.</a:t>
+            </a:r>
+          </a:p>
+        </p:txBody>
+      </p:sp>
+      <p:sp>
+        <p:nvSpPr>
+          <p:cNvPr id="6" name="Rounded Rectangle 5"/>
+          <p:cNvSpPr/>
+          <p:nvPr/>
+        </p:nvSpPr>
+        <p:spPr>
+          <a:xfrm>
+            <a:off x="7132320" y="1645920"/>
+            <a:ext cx="4297680" cy="4389120"/>
+          </a:xfrm>
+          <a:prstGeom prst="roundRect">
+            <a:avLst/>
+          </a:prstGeom>
+          <a:solidFill>
+            <a:srgbClr val="1E293B"/>
+          </a:solidFill>
+          <a:ln w="19050">
+            <a:solidFill>
+              <a:srgbClr val="F59E0B"/>
+            </a:solidFill>
+          </a:ln>
+        </p:spPr>
+        <p:style>
+          <a:lnRef idx="1">
+            <a:schemeClr val="accent1"/>
+          </a:lnRef>
+          <a:fillRef idx="3">
+            <a:schemeClr val="accent1"/>
+          </a:fillRef>
+          <a:effectRef idx="2">
+            <a:schemeClr val="accent1"/>
+          </a:effectRef>
+          <a:fontRef idx="minor">
+            <a:schemeClr val="lt1"/>
+          </a:fontRef>
+        </p:style>
+        <p:txBody>
+          <a:bodyPr rtlCol="0" anchor="ctr"/>
+          <a:lstStyle/>
+          <a:p>
+            <a:pPr algn="ctr"/>
+          </a:p>
+        </p:txBody>
+      </p:sp>
+      <p:sp>
+        <p:nvSpPr>
+          <p:cNvPr id="7" name="TextBox 6"/>
+          <p:cNvSpPr txBox="1"/>
+          <p:nvPr/>
+        </p:nvSpPr>
+        <p:spPr>
+          <a:xfrm>
+            <a:off x="7315200" y="1828800"/>
+            <a:ext cx="3931920" cy="4023359"/>
+          </a:xfrm>
+          <a:prstGeom prst="rect">
+            <a:avLst/>
+          </a:prstGeom>
+          <a:noFill/>
+        </p:spPr>
+        <p:txBody>
+          <a:bodyPr wrap="square">
+            <a:spAutoFit/>
+          </a:bodyPr>
+          <a:lstStyle/>
+          <a:p>
+            <a:pPr>
+              <a:defRPr sz="1400" b="1">
+                <a:solidFill>
+                  <a:srgbClr val="F59E0B"/>
+                </a:solidFill>
+              </a:defRPr>
+            </a:pPr>
+            <a:r>
+              <a:t>Multi-Corridor Management</a:t>
+            </a:r>
+          </a:p>
+          <a:p>
+            <a:pPr>
+              <a:spcAft>
+                <a:spcPts val="400"/>
+              </a:spcAft>
+              <a:defRPr sz="1100">
+                <a:solidFill>
+                  <a:srgbClr val="F8FAFC"/>
+                </a:solidFill>
+              </a:defRPr>
+            </a:pPr>
+            <a:r>
+              <a:t>• State Route 17 (Mile 22): Mountain highway with heavy thermal cracking and slope stress.</a:t>
+            </a:r>
+          </a:p>
+          <a:p>
+            <a:pPr>
+              <a:spcAft>
+                <a:spcPts val="400"/>
+              </a:spcAft>
+              <a:defRPr sz="1100">
+                <a:solidFill>
+                  <a:srgbClr val="F8FAFC"/>
+                </a:solidFill>
+              </a:defRPr>
+            </a:pPr>
+            <a:r>
+              <a:t>• Interstate 80 Westbound: High-volume freight expressway with fatigue alligator cracking.</a:t>
+            </a:r>
+          </a:p>
+          <a:p>
+            <a:pPr>
+              <a:spcAft>
+                <a:spcPts val="400"/>
+              </a:spcAft>
+              <a:defRPr sz="1100">
+                <a:solidFill>
+                  <a:srgbClr val="F8FAFC"/>
+                </a:solidFill>
+              </a:defRPr>
+            </a:pPr>
+            <a:r>
+              <a:t>• Broadway Boulevard: Urban arterial with frequent utility trenching and joint failures.</a:t>
+            </a:r>
+          </a:p>
+          <a:p>
+            <a:pPr>
+              <a:spcAft>
+                <a:spcPts val="400"/>
+              </a:spcAft>
+              <a:defRPr sz="1100">
+                <a:solidFill>
+                  <a:srgbClr val="F8FAFC"/>
+                </a:solidFill>
+              </a:defRPr>
+            </a:pPr>
+            <a:r>
+              <a:t>• Pacific Coast Highway: Coastal route exposed to marine salt spray and edge erosion.</a:t>
+            </a:r>
+          </a:p>
+          <a:p>
+            <a:pPr>
+              <a:spcAft>
+                <a:spcPts val="400"/>
+              </a:spcAft>
+              <a:defRPr sz="1100">
+                <a:solidFill>
+                  <a:srgbClr val="F8FAFC"/>
+                </a:solidFill>
+              </a:defRPr>
+            </a:pPr>
+            <a:r>
+              <a:t>• Instant corridor re-indexing with precise chainage tracking and historical log filtering.</a:t>
+            </a:r>
+          </a:p>
+        </p:txBody>
+      </p:sp>
+    </p:spTree>
+  </p:cSld>
+  <p:clrMapOvr>
+    <a:masterClrMapping/>
+  </p:clrMapOvr>
+</p:sld>
+</file>
+
+<file path=ppt/slides/slide11.xml><?xml version="1.0" encoding="utf-8"?>
+<p:sld xmlns:a="http://schemas.openxmlformats.org/drawingml/2006/main" xmlns:p="http://schemas.openxmlformats.org/presentationml/2006/main" xmlns:r="http://schemas.openxmlformats.org/officeDocument/2006/relationships">
+  <p:cSld>
+    <p:spTree>
+      <p:nvGrpSpPr>
+        <p:cNvPr id="1" name=""/>
+        <p:cNvGrpSpPr/>
+        <p:nvPr/>
+      </p:nvGrpSpPr>
+      <p:grpSpPr/>
+      <p:sp>
+        <p:nvSpPr>
+          <p:cNvPr id="2" name="Rectangle 1"/>
+          <p:cNvSpPr/>
+          <p:nvPr/>
+        </p:nvSpPr>
+        <p:spPr>
+          <a:xfrm>
+            <a:off x="0" y="0"/>
+            <a:ext cx="12191695" cy="6858000"/>
+          </a:xfrm>
+          <a:prstGeom prst="rect">
+            <a:avLst/>
+          </a:prstGeom>
+          <a:solidFill>
+            <a:srgbClr val="0F172A"/>
+          </a:solidFill>
+          <a:ln>
+            <a:noFill/>
+          </a:ln>
+        </p:spPr>
+        <p:style>
+          <a:lnRef idx="1">
+            <a:schemeClr val="accent1"/>
+          </a:lnRef>
+          <a:fillRef idx="3">
+            <a:schemeClr val="accent1"/>
+          </a:fillRef>
+          <a:effectRef idx="2">
+            <a:schemeClr val="accent1"/>
+          </a:effectRef>
+          <a:fontRef idx="minor">
+            <a:schemeClr val="lt1"/>
+          </a:fontRef>
+        </p:style>
+        <p:txBody>
+          <a:bodyPr rtlCol="0" anchor="ctr"/>
+          <a:lstStyle/>
+          <a:p>
+            <a:pPr algn="ctr"/>
+          </a:p>
+        </p:txBody>
+      </p:sp>
+      <p:sp>
+        <p:nvSpPr>
+          <p:cNvPr id="3" name="TextBox 2"/>
+          <p:cNvSpPr txBox="1"/>
+          <p:nvPr/>
+        </p:nvSpPr>
+        <p:spPr>
+          <a:xfrm>
+            <a:off x="731520" y="365760"/>
+            <a:ext cx="10728655" cy="1005840"/>
+          </a:xfrm>
+          <a:prstGeom prst="rect">
+            <a:avLst/>
+          </a:prstGeom>
+          <a:noFill/>
+        </p:spPr>
+        <p:txBody>
+          <a:bodyPr wrap="square">
+            <a:spAutoFit/>
+          </a:bodyPr>
+          <a:lstStyle/>
+          <a:p>
+            <a:pPr>
+              <a:defRPr sz="1100" b="1">
+                <a:solidFill>
+                  <a:srgbClr val="F59E0B"/>
+                </a:solidFill>
+              </a:defRPr>
+            </a:pPr>
+            <a:r>
+              <a:t>CIVIL INFRASTRUCTURE &amp; COMPUTER VISION • PROJECT-038</a:t>
+            </a:r>
+          </a:p>
+          <a:p>
+            <a:pPr>
+              <a:defRPr sz="2200" b="1">
+                <a:solidFill>
+                  <a:srgbClr val="F8FAFC"/>
+                </a:solidFill>
+              </a:defRPr>
+            </a:pPr>
+            <a:r>
+              <a:t>High-Severity Alligator Fatigue Cracking Assessment</a:t>
+            </a:r>
+          </a:p>
+        </p:txBody>
+      </p:sp>
+      <p:pic>
+        <p:nvPicPr>
+          <p:cNvPr id="4" name="Picture 3" descr="04_alligator_fatigue_distress.png"/>
+          <p:cNvPicPr>
+            <a:picLocks noChangeAspect="1"/>
+          </p:cNvPicPr>
+          <p:nvPr/>
+        </p:nvPicPr>
+        <p:blipFill>
+          <a:blip r:embed="rId2"/>
+          <a:stretch>
+            <a:fillRect/>
+          </a:stretch>
+        </p:blipFill>
+        <p:spPr>
+          <a:xfrm>
+            <a:off x="731520" y="1645920"/>
+            <a:ext cx="6217920" cy="4389120"/>
+          </a:xfrm>
+          <a:prstGeom prst="rect">
+            <a:avLst/>
+          </a:prstGeom>
+        </p:spPr>
+      </p:pic>
+      <p:sp>
+        <p:nvSpPr>
+          <p:cNvPr id="5" name="TextBox 4"/>
+          <p:cNvSpPr txBox="1"/>
+          <p:nvPr/>
+        </p:nvSpPr>
+        <p:spPr>
+          <a:xfrm>
+            <a:off x="731520" y="6080759"/>
+            <a:ext cx="6217920" cy="365760"/>
+          </a:xfrm>
+          <a:prstGeom prst="rect">
+            <a:avLst/>
+          </a:prstGeom>
+          <a:noFill/>
+        </p:spPr>
+        <p:txBody>
+          <a:bodyPr wrap="none">
+            <a:spAutoFit/>
+          </a:bodyPr>
+          <a:lstStyle/>
+          <a:p>
+            <a:pPr>
+              <a:defRPr sz="1000" i="1">
+                <a:solidFill>
+                  <a:srgbClr val="94A3B8"/>
+                </a:solidFill>
+              </a:defRPr>
+            </a:pPr>
+            <a:r>
+              <a:t>Figure 4: Injected alligator cracking scenario showing severe distress pattern, critical PCI rating, and mill-and-fill order.</a:t>
+            </a:r>
+          </a:p>
+        </p:txBody>
+      </p:sp>
+      <p:sp>
+        <p:nvSpPr>
+          <p:cNvPr id="6" name="Rounded Rectangle 5"/>
+          <p:cNvSpPr/>
+          <p:nvPr/>
+        </p:nvSpPr>
+        <p:spPr>
+          <a:xfrm>
+            <a:off x="7132320" y="1645920"/>
+            <a:ext cx="4297680" cy="4389120"/>
+          </a:xfrm>
+          <a:prstGeom prst="roundRect">
+            <a:avLst/>
+          </a:prstGeom>
+          <a:solidFill>
+            <a:srgbClr val="1E293B"/>
+          </a:solidFill>
+          <a:ln w="19050">
+            <a:solidFill>
+              <a:srgbClr val="EF4444"/>
+            </a:solidFill>
+          </a:ln>
+        </p:spPr>
+        <p:style>
+          <a:lnRef idx="1">
+            <a:schemeClr val="accent1"/>
+          </a:lnRef>
+          <a:fillRef idx="3">
+            <a:schemeClr val="accent1"/>
+          </a:fillRef>
+          <a:effectRef idx="2">
+            <a:schemeClr val="accent1"/>
+          </a:effectRef>
+          <a:fontRef idx="minor">
+            <a:schemeClr val="lt1"/>
+          </a:fontRef>
+        </p:style>
+        <p:txBody>
+          <a:bodyPr rtlCol="0" anchor="ctr"/>
+          <a:lstStyle/>
+          <a:p>
+            <a:pPr algn="ctr"/>
+          </a:p>
+        </p:txBody>
+      </p:sp>
+      <p:sp>
+        <p:nvSpPr>
+          <p:cNvPr id="7" name="TextBox 6"/>
+          <p:cNvSpPr txBox="1"/>
+          <p:nvPr/>
+        </p:nvSpPr>
+        <p:spPr>
+          <a:xfrm>
+            <a:off x="7315200" y="1828800"/>
+            <a:ext cx="3931920" cy="4023359"/>
+          </a:xfrm>
+          <a:prstGeom prst="rect">
+            <a:avLst/>
+          </a:prstGeom>
+          <a:noFill/>
+        </p:spPr>
+        <p:txBody>
+          <a:bodyPr wrap="square">
+            <a:spAutoFit/>
+          </a:bodyPr>
+          <a:lstStyle/>
+          <a:p>
+            <a:pPr>
+              <a:defRPr sz="1400" b="1">
+                <a:solidFill>
+                  <a:srgbClr val="F59E0B"/>
+                </a:solidFill>
+              </a:defRPr>
+            </a:pPr>
+            <a:r>
+              <a:t>Alligator Fatigue Analysis</a:t>
+            </a:r>
+          </a:p>
+          <a:p>
+            <a:pPr>
+              <a:spcAft>
+                <a:spcPts val="400"/>
+              </a:spcAft>
+              <a:defRPr sz="1100">
+                <a:solidFill>
+                  <a:srgbClr val="F8FAFC"/>
+                </a:solidFill>
+              </a:defRPr>
+            </a:pPr>
+            <a:r>
+              <a:t>• Detects interconnected polygonal crack networks caused by repeated heavy axle loading.</a:t>
+            </a:r>
+          </a:p>
+          <a:p>
+            <a:pPr>
+              <a:spcAft>
+                <a:spcPts val="400"/>
+              </a:spcAft>
+              <a:defRPr sz="1100">
+                <a:solidFill>
+                  <a:srgbClr val="F8FAFC"/>
+                </a:solidFill>
+              </a:defRPr>
+            </a:pPr>
+            <a:r>
+              <a:t>• Mean crack width measured at 12.0 mm with elevated surface density exceeding 45%.</a:t>
+            </a:r>
+          </a:p>
+          <a:p>
+            <a:pPr>
+              <a:spcAft>
+                <a:spcPts val="400"/>
+              </a:spcAft>
+              <a:defRPr sz="1100">
+                <a:solidFill>
+                  <a:srgbClr val="F8FAFC"/>
+                </a:solidFill>
+              </a:defRPr>
+            </a:pPr>
+            <a:r>
+              <a:t>• PCI condition score drops to 15.0 / 100 ('Serious / Failed' condition category).</a:t>
+            </a:r>
+          </a:p>
+          <a:p>
+            <a:pPr>
+              <a:spcAft>
+                <a:spcPts val="400"/>
+              </a:spcAft>
+              <a:defRPr sz="1100">
+                <a:solidFill>
+                  <a:srgbClr val="F8FAFC"/>
+                </a:solidFill>
+              </a:defRPr>
+            </a:pPr>
+            <a:r>
+              <a:t>• Maintenance directive automatically assigned to 'FULL DEPTH MILL AND FILL RECONSTRUCTION'.</a:t>
+            </a:r>
+          </a:p>
+          <a:p>
+            <a:pPr>
+              <a:spcAft>
+                <a:spcPts val="400"/>
+              </a:spcAft>
+              <a:defRPr sz="1100">
+                <a:solidFill>
+                  <a:srgbClr val="F8FAFC"/>
+                </a:solidFill>
+              </a:defRPr>
+            </a:pPr>
+            <a:r>
+              <a:t>• Generates urgent maintenance work order with estimated $4,500 contractor allocation.</a:t>
+            </a:r>
+          </a:p>
+        </p:txBody>
+      </p:sp>
+    </p:spTree>
+  </p:cSld>
+  <p:clrMapOvr>
+    <a:masterClrMapping/>
+  </p:clrMapOvr>
+</p:sld>
+</file>
+
+<file path=ppt/slides/slide12.xml><?xml version="1.0" encoding="utf-8"?>
+<p:sld xmlns:a="http://schemas.openxmlformats.org/drawingml/2006/main" xmlns:p="http://schemas.openxmlformats.org/presentationml/2006/main" xmlns:r="http://schemas.openxmlformats.org/officeDocument/2006/relationships">
+  <p:cSld>
+    <p:spTree>
+      <p:nvGrpSpPr>
+        <p:cNvPr id="1" name=""/>
+        <p:cNvGrpSpPr/>
+        <p:nvPr/>
+      </p:nvGrpSpPr>
+      <p:grpSpPr/>
+      <p:sp>
+        <p:nvSpPr>
+          <p:cNvPr id="2" name="Rectangle 1"/>
+          <p:cNvSpPr/>
+          <p:nvPr/>
+        </p:nvSpPr>
+        <p:spPr>
+          <a:xfrm>
+            <a:off x="0" y="0"/>
+            <a:ext cx="12191695" cy="6858000"/>
+          </a:xfrm>
+          <a:prstGeom prst="rect">
+            <a:avLst/>
+          </a:prstGeom>
+          <a:solidFill>
+            <a:srgbClr val="0F172A"/>
+          </a:solidFill>
+          <a:ln>
+            <a:noFill/>
+          </a:ln>
+        </p:spPr>
+        <p:style>
+          <a:lnRef idx="1">
+            <a:schemeClr val="accent1"/>
+          </a:lnRef>
+          <a:fillRef idx="3">
+            <a:schemeClr val="accent1"/>
+          </a:fillRef>
+          <a:effectRef idx="2">
+            <a:schemeClr val="accent1"/>
+          </a:effectRef>
+          <a:fontRef idx="minor">
+            <a:schemeClr val="lt1"/>
+          </a:fontRef>
+        </p:style>
+        <p:txBody>
+          <a:bodyPr rtlCol="0" anchor="ctr"/>
+          <a:lstStyle/>
+          <a:p>
+            <a:pPr algn="ctr"/>
+          </a:p>
+        </p:txBody>
+      </p:sp>
+      <p:sp>
+        <p:nvSpPr>
+          <p:cNvPr id="3" name="TextBox 2"/>
+          <p:cNvSpPr txBox="1"/>
+          <p:nvPr/>
+        </p:nvSpPr>
+        <p:spPr>
+          <a:xfrm>
+            <a:off x="731520" y="365760"/>
+            <a:ext cx="10728655" cy="1005840"/>
+          </a:xfrm>
+          <a:prstGeom prst="rect">
+            <a:avLst/>
+          </a:prstGeom>
+          <a:noFill/>
+        </p:spPr>
+        <p:txBody>
+          <a:bodyPr wrap="square">
+            <a:spAutoFit/>
+          </a:bodyPr>
+          <a:lstStyle/>
+          <a:p>
+            <a:pPr>
+              <a:defRPr sz="1100" b="1">
+                <a:solidFill>
+                  <a:srgbClr val="F59E0B"/>
+                </a:solidFill>
+              </a:defRPr>
+            </a:pPr>
+            <a:r>
+              <a:t>CIVIL INFRASTRUCTURE &amp; COMPUTER VISION • PROJECT-038</a:t>
+            </a:r>
+          </a:p>
+          <a:p>
+            <a:pPr>
+              <a:defRPr sz="2200" b="1">
+                <a:solidFill>
+                  <a:srgbClr val="F8FAFC"/>
+                </a:solidFill>
+              </a:defRPr>
+            </a:pPr>
+            <a:r>
+              <a:t>Transverse Thermal Shrinkage Crack Detection</a:t>
+            </a:r>
+          </a:p>
+        </p:txBody>
+      </p:sp>
+      <p:pic>
+        <p:nvPicPr>
+          <p:cNvPr id="4" name="Picture 3" descr="05_transverse_thermal_crack.png"/>
+          <p:cNvPicPr>
+            <a:picLocks noChangeAspect="1"/>
+          </p:cNvPicPr>
+          <p:nvPr/>
+        </p:nvPicPr>
+        <p:blipFill>
+          <a:blip r:embed="rId2"/>
+          <a:stretch>
+            <a:fillRect/>
+          </a:stretch>
+        </p:blipFill>
+        <p:spPr>
+          <a:xfrm>
+            <a:off x="731520" y="1645920"/>
+            <a:ext cx="6217920" cy="4389120"/>
+          </a:xfrm>
+          <a:prstGeom prst="rect">
+            <a:avLst/>
+          </a:prstGeom>
+        </p:spPr>
+      </p:pic>
+      <p:sp>
+        <p:nvSpPr>
+          <p:cNvPr id="5" name="TextBox 4"/>
+          <p:cNvSpPr txBox="1"/>
+          <p:nvPr/>
+        </p:nvSpPr>
+        <p:spPr>
+          <a:xfrm>
+            <a:off x="731520" y="6080759"/>
+            <a:ext cx="6217920" cy="365760"/>
+          </a:xfrm>
+          <a:prstGeom prst="rect">
+            <a:avLst/>
+          </a:prstGeom>
+          <a:noFill/>
+        </p:spPr>
+        <p:txBody>
+          <a:bodyPr wrap="none">
+            <a:spAutoFit/>
+          </a:bodyPr>
+          <a:lstStyle/>
+          <a:p>
+            <a:pPr>
+              <a:defRPr sz="1000" i="1">
+                <a:solidFill>
+                  <a:srgbClr val="94A3B8"/>
+                </a:solidFill>
+              </a:defRPr>
+            </a:pPr>
+            <a:r>
+              <a:t>Figure 5: Transverse crack running perpendicular to traffic flow evaluated with medium severity and sealing directive.</a:t>
+            </a:r>
+          </a:p>
+        </p:txBody>
+      </p:sp>
+      <p:sp>
+        <p:nvSpPr>
+          <p:cNvPr id="6" name="Rounded Rectangle 5"/>
+          <p:cNvSpPr/>
+          <p:nvPr/>
+        </p:nvSpPr>
+        <p:spPr>
+          <a:xfrm>
+            <a:off x="7132320" y="1645920"/>
+            <a:ext cx="4297680" cy="4389120"/>
+          </a:xfrm>
+          <a:prstGeom prst="roundRect">
+            <a:avLst/>
+          </a:prstGeom>
+          <a:solidFill>
+            <a:srgbClr val="1E293B"/>
+          </a:solidFill>
+          <a:ln w="19050">
+            <a:solidFill>
+              <a:srgbClr val="F59E0B"/>
+            </a:solidFill>
+          </a:ln>
+        </p:spPr>
+        <p:style>
+          <a:lnRef idx="1">
+            <a:schemeClr val="accent1"/>
+          </a:lnRef>
+          <a:fillRef idx="3">
+            <a:schemeClr val="accent1"/>
+          </a:fillRef>
+          <a:effectRef idx="2">
+            <a:schemeClr val="accent1"/>
+          </a:effectRef>
+          <a:fontRef idx="minor">
+            <a:schemeClr val="lt1"/>
+          </a:fontRef>
+        </p:style>
+        <p:txBody>
+          <a:bodyPr rtlCol="0" anchor="ctr"/>
+          <a:lstStyle/>
+          <a:p>
+            <a:pPr algn="ctr"/>
+          </a:p>
+        </p:txBody>
+      </p:sp>
+      <p:sp>
+        <p:nvSpPr>
+          <p:cNvPr id="7" name="TextBox 6"/>
+          <p:cNvSpPr txBox="1"/>
+          <p:nvPr/>
+        </p:nvSpPr>
+        <p:spPr>
+          <a:xfrm>
+            <a:off x="7315200" y="1828800"/>
+            <a:ext cx="3931920" cy="4023359"/>
+          </a:xfrm>
+          <a:prstGeom prst="rect">
+            <a:avLst/>
+          </a:prstGeom>
+          <a:noFill/>
+        </p:spPr>
+        <p:txBody>
+          <a:bodyPr wrap="square">
+            <a:spAutoFit/>
+          </a:bodyPr>
+          <a:lstStyle/>
+          <a:p>
+            <a:pPr>
+              <a:defRPr sz="1400" b="1">
+                <a:solidFill>
+                  <a:srgbClr val="F59E0B"/>
+                </a:solidFill>
+              </a:defRPr>
+            </a:pPr>
+            <a:r>
+              <a:t>Transverse Crack Dynamics</a:t>
+            </a:r>
+          </a:p>
+          <a:p>
+            <a:pPr>
+              <a:spcAft>
+                <a:spcPts val="400"/>
+              </a:spcAft>
+              <a:defRPr sz="1100">
+                <a:solidFill>
+                  <a:srgbClr val="F8FAFC"/>
+                </a:solidFill>
+              </a:defRPr>
+            </a:pPr>
+            <a:r>
+              <a:t>• Evaluates thermal shrinkage cracks extending perpendicular to the roadway centerline.</a:t>
+            </a:r>
+          </a:p>
+          <a:p>
+            <a:pPr>
+              <a:spcAft>
+                <a:spcPts val="400"/>
+              </a:spcAft>
+              <a:defRPr sz="1100">
+                <a:solidFill>
+                  <a:srgbClr val="F8FAFC"/>
+                </a:solidFill>
+              </a:defRPr>
+            </a:pPr>
+            <a:r>
+              <a:t>• Mean crack width measured at 3.2 mm with moderate crack propagation length.</a:t>
+            </a:r>
+          </a:p>
+          <a:p>
+            <a:pPr>
+              <a:spcAft>
+                <a:spcPts val="400"/>
+              </a:spcAft>
+              <a:defRPr sz="1100">
+                <a:solidFill>
+                  <a:srgbClr val="F8FAFC"/>
+                </a:solidFill>
+              </a:defRPr>
+            </a:pPr>
+            <a:r>
+              <a:t>• PCI condition score rated at 62.0 / 100 ('Fair / Satisfactory' pavement state).</a:t>
+            </a:r>
+          </a:p>
+          <a:p>
+            <a:pPr>
+              <a:spcAft>
+                <a:spcPts val="400"/>
+              </a:spcAft>
+              <a:defRPr sz="1100">
+                <a:solidFill>
+                  <a:srgbClr val="F8FAFC"/>
+                </a:solidFill>
+              </a:defRPr>
+            </a:pPr>
+            <a:r>
+              <a:t>• Maintenance directive triggers 'PREVENTIVE CRACK SEALING OR SLURRY OVERLAY'.</a:t>
+            </a:r>
+          </a:p>
+          <a:p>
+            <a:pPr>
+              <a:spcAft>
+                <a:spcPts val="400"/>
+              </a:spcAft>
+              <a:defRPr sz="1100">
+                <a:solidFill>
+                  <a:srgbClr val="F8FAFC"/>
+                </a:solidFill>
+              </a:defRPr>
+            </a:pPr>
+            <a:r>
+              <a:t>• Timely intervention prevents water ingress into base course, saving 80% in lifecycle costs.</a:t>
+            </a:r>
+          </a:p>
+        </p:txBody>
+      </p:sp>
+    </p:spTree>
+  </p:cSld>
+  <p:clrMapOvr>
+    <a:masterClrMapping/>
+  </p:clrMapOvr>
+</p:sld>
+</file>
+
+<file path=ppt/slides/slide13.xml><?xml version="1.0" encoding="utf-8"?>
+<p:sld xmlns:a="http://schemas.openxmlformats.org/drawingml/2006/main" xmlns:p="http://schemas.openxmlformats.org/presentationml/2006/main" xmlns:r="http://schemas.openxmlformats.org/officeDocument/2006/relationships">
+  <p:cSld>
+    <p:spTree>
+      <p:nvGrpSpPr>
+        <p:cNvPr id="1" name=""/>
+        <p:cNvGrpSpPr/>
+        <p:nvPr/>
+      </p:nvGrpSpPr>
+      <p:grpSpPr/>
+      <p:sp>
+        <p:nvSpPr>
+          <p:cNvPr id="2" name="Rectangle 1"/>
+          <p:cNvSpPr/>
+          <p:nvPr/>
+        </p:nvSpPr>
+        <p:spPr>
+          <a:xfrm>
+            <a:off x="0" y="0"/>
+            <a:ext cx="12191695" cy="6858000"/>
+          </a:xfrm>
+          <a:prstGeom prst="rect">
+            <a:avLst/>
+          </a:prstGeom>
+          <a:solidFill>
+            <a:srgbClr val="0F172A"/>
+          </a:solidFill>
+          <a:ln>
+            <a:noFill/>
+          </a:ln>
+        </p:spPr>
+        <p:style>
+          <a:lnRef idx="1">
+            <a:schemeClr val="accent1"/>
+          </a:lnRef>
+          <a:fillRef idx="3">
+            <a:schemeClr val="accent1"/>
+          </a:fillRef>
+          <a:effectRef idx="2">
+            <a:schemeClr val="accent1"/>
+          </a:effectRef>
+          <a:fontRef idx="minor">
+            <a:schemeClr val="lt1"/>
+          </a:fontRef>
+        </p:style>
+        <p:txBody>
+          <a:bodyPr rtlCol="0" anchor="ctr"/>
+          <a:lstStyle/>
+          <a:p>
+            <a:pPr algn="ctr"/>
+          </a:p>
+        </p:txBody>
+      </p:sp>
+      <p:sp>
+        <p:nvSpPr>
+          <p:cNvPr id="3" name="TextBox 2"/>
+          <p:cNvSpPr txBox="1"/>
+          <p:nvPr/>
+        </p:nvSpPr>
+        <p:spPr>
+          <a:xfrm>
+            <a:off x="731520" y="365760"/>
+            <a:ext cx="10728655" cy="1005840"/>
+          </a:xfrm>
+          <a:prstGeom prst="rect">
+            <a:avLst/>
+          </a:prstGeom>
+          <a:noFill/>
+        </p:spPr>
+        <p:txBody>
+          <a:bodyPr wrap="square">
+            <a:spAutoFit/>
+          </a:bodyPr>
+          <a:lstStyle/>
+          <a:p>
+            <a:pPr>
+              <a:defRPr sz="1100" b="1">
+                <a:solidFill>
+                  <a:srgbClr val="F59E0B"/>
+                </a:solidFill>
+              </a:defRPr>
+            </a:pPr>
+            <a:r>
+              <a:t>CIVIL INFRASTRUCTURE &amp; COMPUTER VISION • PROJECT-038</a:t>
+            </a:r>
+          </a:p>
+          <a:p>
+            <a:pPr>
+              <a:defRPr sz="2200" b="1">
+                <a:solidFill>
+                  <a:srgbClr val="F8FAFC"/>
+                </a:solidFill>
+              </a:defRPr>
+            </a:pPr>
+            <a:r>
+              <a:t>Localized Pothole Emergency Distress &amp; Safety Interventions</a:t>
+            </a:r>
+          </a:p>
+        </p:txBody>
+      </p:sp>
+      <p:pic>
+        <p:nvPicPr>
+          <p:cNvPr id="4" name="Picture 3" descr="06_pothole_emergency_distress.png"/>
+          <p:cNvPicPr>
+            <a:picLocks noChangeAspect="1"/>
+          </p:cNvPicPr>
+          <p:nvPr/>
+        </p:nvPicPr>
+        <p:blipFill>
+          <a:blip r:embed="rId2"/>
+          <a:stretch>
+            <a:fillRect/>
+          </a:stretch>
+        </p:blipFill>
+        <p:spPr>
+          <a:xfrm>
+            <a:off x="731520" y="1645920"/>
+            <a:ext cx="6217920" cy="4389120"/>
+          </a:xfrm>
+          <a:prstGeom prst="rect">
+            <a:avLst/>
+          </a:prstGeom>
+        </p:spPr>
+      </p:pic>
+      <p:sp>
+        <p:nvSpPr>
+          <p:cNvPr id="5" name="TextBox 4"/>
+          <p:cNvSpPr txBox="1"/>
+          <p:nvPr/>
+        </p:nvSpPr>
+        <p:spPr>
+          <a:xfrm>
+            <a:off x="731520" y="6080759"/>
+            <a:ext cx="6217920" cy="365760"/>
+          </a:xfrm>
+          <a:prstGeom prst="rect">
+            <a:avLst/>
+          </a:prstGeom>
+          <a:noFill/>
+        </p:spPr>
+        <p:txBody>
+          <a:bodyPr wrap="none">
+            <a:spAutoFit/>
+          </a:bodyPr>
+          <a:lstStyle/>
+          <a:p>
+            <a:pPr>
+              <a:defRPr sz="1000" i="1">
+                <a:solidFill>
+                  <a:srgbClr val="94A3B8"/>
+                </a:solidFill>
+              </a:defRPr>
+            </a:pPr>
+            <a:r>
+              <a:t>Figure 6: Severe localized pothole depression with high vehicular hazard index and emergency priority dispatch.</a:t>
+            </a:r>
+          </a:p>
+        </p:txBody>
+      </p:sp>
+      <p:sp>
+        <p:nvSpPr>
+          <p:cNvPr id="6" name="Rounded Rectangle 5"/>
+          <p:cNvSpPr/>
+          <p:nvPr/>
+        </p:nvSpPr>
+        <p:spPr>
+          <a:xfrm>
+            <a:off x="7132320" y="1645920"/>
+            <a:ext cx="4297680" cy="4389120"/>
+          </a:xfrm>
+          <a:prstGeom prst="roundRect">
+            <a:avLst/>
+          </a:prstGeom>
+          <a:solidFill>
+            <a:srgbClr val="1E293B"/>
+          </a:solidFill>
+          <a:ln w="19050">
+            <a:solidFill>
+              <a:srgbClr val="EF4444"/>
+            </a:solidFill>
+          </a:ln>
+        </p:spPr>
+        <p:style>
+          <a:lnRef idx="1">
+            <a:schemeClr val="accent1"/>
+          </a:lnRef>
+          <a:fillRef idx="3">
+            <a:schemeClr val="accent1"/>
+          </a:fillRef>
+          <a:effectRef idx="2">
+            <a:schemeClr val="accent1"/>
+          </a:effectRef>
+          <a:fontRef idx="minor">
+            <a:schemeClr val="lt1"/>
+          </a:fontRef>
+        </p:style>
+        <p:txBody>
+          <a:bodyPr rtlCol="0" anchor="ctr"/>
+          <a:lstStyle/>
+          <a:p>
+            <a:pPr algn="ctr"/>
+          </a:p>
+        </p:txBody>
+      </p:sp>
+      <p:sp>
+        <p:nvSpPr>
+          <p:cNvPr id="7" name="TextBox 6"/>
+          <p:cNvSpPr txBox="1"/>
+          <p:nvPr/>
+        </p:nvSpPr>
+        <p:spPr>
+          <a:xfrm>
+            <a:off x="7315200" y="1828800"/>
+            <a:ext cx="3931920" cy="4023359"/>
+          </a:xfrm>
+          <a:prstGeom prst="rect">
+            <a:avLst/>
+          </a:prstGeom>
+          <a:noFill/>
+        </p:spPr>
+        <p:txBody>
+          <a:bodyPr wrap="square">
+            <a:spAutoFit/>
+          </a:bodyPr>
+          <a:lstStyle/>
+          <a:p>
+            <a:pPr>
+              <a:defRPr sz="1400" b="1">
+                <a:solidFill>
+                  <a:srgbClr val="F59E0B"/>
+                </a:solidFill>
+              </a:defRPr>
+            </a:pPr>
+            <a:r>
+              <a:t>Pothole Emergency Response</a:t>
+            </a:r>
+          </a:p>
+          <a:p>
+            <a:pPr>
+              <a:spcAft>
+                <a:spcPts val="400"/>
+              </a:spcAft>
+              <a:defRPr sz="1100">
+                <a:solidFill>
+                  <a:srgbClr val="F8FAFC"/>
+                </a:solidFill>
+              </a:defRPr>
+            </a:pPr>
+            <a:r>
+              <a:t>• Detects severe bowl-shaped localized depressions with bowl depth exceeding 30 mm.</a:t>
+            </a:r>
+          </a:p>
+          <a:p>
+            <a:pPr>
+              <a:spcAft>
+                <a:spcPts val="400"/>
+              </a:spcAft>
+              <a:defRPr sz="1100">
+                <a:solidFill>
+                  <a:srgbClr val="F8FAFC"/>
+                </a:solidFill>
+              </a:defRPr>
+            </a:pPr>
+            <a:r>
+              <a:t>• High International Roughness Index (IRI &gt; 5.5) represents immediate vehicular tire hazard.</a:t>
+            </a:r>
+          </a:p>
+          <a:p>
+            <a:pPr>
+              <a:spcAft>
+                <a:spcPts val="400"/>
+              </a:spcAft>
+              <a:defRPr sz="1100">
+                <a:solidFill>
+                  <a:srgbClr val="F8FAFC"/>
+                </a:solidFill>
+              </a:defRPr>
+            </a:pPr>
+            <a:r>
+              <a:t>• PCI score plunges to critical threshold with structural failure risk evaluated at 0.95+.</a:t>
+            </a:r>
+          </a:p>
+          <a:p>
+            <a:pPr>
+              <a:spcAft>
+                <a:spcPts val="400"/>
+              </a:spcAft>
+              <a:defRPr sz="1100">
+                <a:solidFill>
+                  <a:srgbClr val="F8FAFC"/>
+                </a:solidFill>
+              </a:defRPr>
+            </a:pPr>
+            <a:r>
+              <a:t>• Instant dispatch of emergency maintenance crew with automated work order generation.</a:t>
+            </a:r>
+          </a:p>
+          <a:p>
+            <a:pPr>
+              <a:spcAft>
+                <a:spcPts val="400"/>
+              </a:spcAft>
+              <a:defRPr sz="1100">
+                <a:solidFill>
+                  <a:srgbClr val="F8FAFC"/>
+                </a:solidFill>
+              </a:defRPr>
+            </a:pPr>
+            <a:r>
+              <a:t>• Coordinates with traffic warning advisories to alert approaching connected vehicles.</a:t>
+            </a:r>
+          </a:p>
+        </p:txBody>
+      </p:sp>
+    </p:spTree>
+  </p:cSld>
+  <p:clrMapOvr>
+    <a:masterClrMapping/>
+  </p:clrMapOvr>
+</p:sld>
+</file>
+
+<file path=ppt/slides/slide14.xml><?xml version="1.0" encoding="utf-8"?>
+<p:sld xmlns:a="http://schemas.openxmlformats.org/drawingml/2006/main" xmlns:p="http://schemas.openxmlformats.org/presentationml/2006/main" xmlns:r="http://schemas.openxmlformats.org/officeDocument/2006/relationships">
+  <p:cSld>
+    <p:spTree>
+      <p:nvGrpSpPr>
+        <p:cNvPr id="1" name=""/>
+        <p:cNvGrpSpPr/>
+        <p:nvPr/>
+      </p:nvGrpSpPr>
+      <p:grpSpPr/>
+      <p:sp>
+        <p:nvSpPr>
+          <p:cNvPr id="2" name="Rectangle 1"/>
+          <p:cNvSpPr/>
+          <p:nvPr/>
+        </p:nvSpPr>
+        <p:spPr>
+          <a:xfrm>
+            <a:off x="0" y="0"/>
+            <a:ext cx="12191695" cy="6858000"/>
+          </a:xfrm>
+          <a:prstGeom prst="rect">
+            <a:avLst/>
+          </a:prstGeom>
+          <a:solidFill>
+            <a:srgbClr val="0F172A"/>
+          </a:solidFill>
+          <a:ln>
+            <a:noFill/>
+          </a:ln>
+        </p:spPr>
+        <p:style>
+          <a:lnRef idx="1">
+            <a:schemeClr val="accent1"/>
+          </a:lnRef>
+          <a:fillRef idx="3">
+            <a:schemeClr val="accent1"/>
+          </a:fillRef>
+          <a:effectRef idx="2">
+            <a:schemeClr val="accent1"/>
+          </a:effectRef>
+          <a:fontRef idx="minor">
+            <a:schemeClr val="lt1"/>
+          </a:fontRef>
+        </p:style>
+        <p:txBody>
+          <a:bodyPr rtlCol="0" anchor="ctr"/>
+          <a:lstStyle/>
+          <a:p>
+            <a:pPr algn="ctr"/>
+          </a:p>
+        </p:txBody>
+      </p:sp>
+      <p:sp>
+        <p:nvSpPr>
+          <p:cNvPr id="3" name="TextBox 2"/>
+          <p:cNvSpPr txBox="1"/>
+          <p:nvPr/>
+        </p:nvSpPr>
+        <p:spPr>
+          <a:xfrm>
+            <a:off x="731520" y="365760"/>
+            <a:ext cx="10728655" cy="1005840"/>
+          </a:xfrm>
+          <a:prstGeom prst="rect">
+            <a:avLst/>
+          </a:prstGeom>
+          <a:noFill/>
+        </p:spPr>
+        <p:txBody>
+          <a:bodyPr wrap="square">
+            <a:spAutoFit/>
+          </a:bodyPr>
+          <a:lstStyle/>
+          <a:p>
+            <a:pPr>
+              <a:defRPr sz="1100" b="1">
+                <a:solidFill>
+                  <a:srgbClr val="F59E0B"/>
+                </a:solidFill>
+              </a:defRPr>
+            </a:pPr>
+            <a:r>
+              <a:t>CIVIL INFRASTRUCTURE &amp; COMPUTER VISION • PROJECT-038</a:t>
+            </a:r>
+          </a:p>
+          <a:p>
+            <a:pPr>
+              <a:defRPr sz="2200" b="1">
+                <a:solidFill>
+                  <a:srgbClr val="F8FAFC"/>
+                </a:solidFill>
+              </a:defRPr>
+            </a:pPr>
+            <a:r>
+              <a:t>Dispatched Maintenance Work Orders &amp; Budget Allocation</a:t>
+            </a:r>
+          </a:p>
+        </p:txBody>
+      </p:sp>
+      <p:pic>
+        <p:nvPicPr>
+          <p:cNvPr id="4" name="Picture 3" descr="07_dispatched_work_orders.png"/>
+          <p:cNvPicPr>
+            <a:picLocks noChangeAspect="1"/>
+          </p:cNvPicPr>
+          <p:nvPr/>
+        </p:nvPicPr>
+        <p:blipFill>
+          <a:blip r:embed="rId2"/>
+          <a:stretch>
+            <a:fillRect/>
+          </a:stretch>
+        </p:blipFill>
+        <p:spPr>
+          <a:xfrm>
+            <a:off x="731520" y="1645920"/>
+            <a:ext cx="6217920" cy="4389120"/>
+          </a:xfrm>
+          <a:prstGeom prst="rect">
+            <a:avLst/>
+          </a:prstGeom>
+        </p:spPr>
+      </p:pic>
+      <p:sp>
+        <p:nvSpPr>
+          <p:cNvPr id="5" name="TextBox 4"/>
+          <p:cNvSpPr txBox="1"/>
+          <p:nvPr/>
+        </p:nvSpPr>
+        <p:spPr>
+          <a:xfrm>
+            <a:off x="731520" y="6080759"/>
+            <a:ext cx="6217920" cy="365760"/>
+          </a:xfrm>
+          <a:prstGeom prst="rect">
+            <a:avLst/>
+          </a:prstGeom>
+          <a:noFill/>
+        </p:spPr>
+        <p:txBody>
+          <a:bodyPr wrap="none">
+            <a:spAutoFit/>
+          </a:bodyPr>
+          <a:lstStyle/>
+          <a:p>
+            <a:pPr>
+              <a:defRPr sz="1000" i="1">
+                <a:solidFill>
+                  <a:srgbClr val="94A3B8"/>
+                </a:solidFill>
+              </a:defRPr>
+            </a:pPr>
+            <a:r>
+              <a:t>Figure 7: Dispatched work orders grid displaying unique IDs, chainage locations, treatment types, and estimated costs.</a:t>
+            </a:r>
+          </a:p>
+        </p:txBody>
+      </p:sp>
+      <p:sp>
+        <p:nvSpPr>
+          <p:cNvPr id="6" name="Rounded Rectangle 5"/>
+          <p:cNvSpPr/>
+          <p:nvPr/>
+        </p:nvSpPr>
+        <p:spPr>
+          <a:xfrm>
+            <a:off x="7132320" y="1645920"/>
+            <a:ext cx="4297680" cy="4389120"/>
+          </a:xfrm>
+          <a:prstGeom prst="roundRect">
+            <a:avLst/>
+          </a:prstGeom>
+          <a:solidFill>
+            <a:srgbClr val="1E293B"/>
+          </a:solidFill>
+          <a:ln w="19050">
+            <a:solidFill>
+              <a:srgbClr val="10B981"/>
+            </a:solidFill>
+          </a:ln>
+        </p:spPr>
+        <p:style>
+          <a:lnRef idx="1">
+            <a:schemeClr val="accent1"/>
+          </a:lnRef>
+          <a:fillRef idx="3">
+            <a:schemeClr val="accent1"/>
+          </a:fillRef>
+          <a:effectRef idx="2">
+            <a:schemeClr val="accent1"/>
+          </a:effectRef>
+          <a:fontRef idx="minor">
+            <a:schemeClr val="lt1"/>
+          </a:fontRef>
+        </p:style>
+        <p:txBody>
+          <a:bodyPr rtlCol="0" anchor="ctr"/>
+          <a:lstStyle/>
+          <a:p>
+            <a:pPr algn="ctr"/>
+          </a:p>
+        </p:txBody>
+      </p:sp>
+      <p:sp>
+        <p:nvSpPr>
+          <p:cNvPr id="7" name="TextBox 6"/>
+          <p:cNvSpPr txBox="1"/>
+          <p:nvPr/>
+        </p:nvSpPr>
+        <p:spPr>
+          <a:xfrm>
+            <a:off x="7315200" y="1828800"/>
+            <a:ext cx="3931920" cy="4023359"/>
+          </a:xfrm>
+          <a:prstGeom prst="rect">
+            <a:avLst/>
+          </a:prstGeom>
+          <a:noFill/>
+        </p:spPr>
+        <p:txBody>
+          <a:bodyPr wrap="square">
+            <a:spAutoFit/>
+          </a:bodyPr>
+          <a:lstStyle/>
+          <a:p>
+            <a:pPr>
+              <a:defRPr sz="1400" b="1">
+                <a:solidFill>
+                  <a:srgbClr val="F59E0B"/>
+                </a:solidFill>
+              </a:defRPr>
+            </a:pPr>
+            <a:r>
+              <a:t>Work Order Pipeline</a:t>
+            </a:r>
+          </a:p>
+          <a:p>
+            <a:pPr>
+              <a:spcAft>
+                <a:spcPts val="400"/>
+              </a:spcAft>
+              <a:defRPr sz="1100">
+                <a:solidFill>
+                  <a:srgbClr val="F8FAFC"/>
+                </a:solidFill>
+              </a:defRPr>
+            </a:pPr>
+            <a:r>
+              <a:t>• Generates unique tracking identifiers (e.g. WO-2026-402) for municipal maintenance crews.</a:t>
+            </a:r>
+          </a:p>
+          <a:p>
+            <a:pPr>
+              <a:spcAft>
+                <a:spcPts val="400"/>
+              </a:spcAft>
+              <a:defRPr sz="1100">
+                <a:solidFill>
+                  <a:srgbClr val="F8FAFC"/>
+                </a:solidFill>
+              </a:defRPr>
+            </a:pPr>
+            <a:r>
+              <a:t>• Calculates objective treatment cost estimates based on surface density and crack width.</a:t>
+            </a:r>
+          </a:p>
+          <a:p>
+            <a:pPr>
+              <a:spcAft>
+                <a:spcPts val="400"/>
+              </a:spcAft>
+              <a:defRPr sz="1100">
+                <a:solidFill>
+                  <a:srgbClr val="F8FAFC"/>
+                </a:solidFill>
+              </a:defRPr>
+            </a:pPr>
+            <a:r>
+              <a:t>• Classifies priority tiers: URGENT (&lt;40 PCI), SCHEDULED (40-70 PCI), MONITOR (&gt;70 PCI).</a:t>
+            </a:r>
+          </a:p>
+          <a:p>
+            <a:pPr>
+              <a:spcAft>
+                <a:spcPts val="400"/>
+              </a:spcAft>
+              <a:defRPr sz="1100">
+                <a:solidFill>
+                  <a:srgbClr val="F8FAFC"/>
+                </a:solidFill>
+              </a:defRPr>
+            </a:pPr>
+            <a:r>
+              <a:t>• Persists work orders into SQLite maintenance_work_orders table with DISPATCHED status.</a:t>
+            </a:r>
+          </a:p>
+          <a:p>
+            <a:pPr>
+              <a:spcAft>
+                <a:spcPts val="400"/>
+              </a:spcAft>
+              <a:defRPr sz="1100">
+                <a:solidFill>
+                  <a:srgbClr val="F8FAFC"/>
+                </a:solidFill>
+              </a:defRPr>
+            </a:pPr>
+            <a:r>
+              <a:t>• Provides municipal civil engineering departments with actionable capital budgeting reports.</a:t>
+            </a:r>
+          </a:p>
+        </p:txBody>
+      </p:sp>
+    </p:spTree>
+  </p:cSld>
+  <p:clrMapOvr>
+    <a:masterClrMapping/>
+  </p:clrMapOvr>
+</p:sld>
+</file>
+
+<file path=ppt/slides/slide15.xml><?xml version="1.0" encoding="utf-8"?>
+<p:sld xmlns:a="http://schemas.openxmlformats.org/drawingml/2006/main" xmlns:p="http://schemas.openxmlformats.org/presentationml/2006/main" xmlns:r="http://schemas.openxmlformats.org/officeDocument/2006/relationships">
+  <p:cSld>
+    <p:spTree>
+      <p:nvGrpSpPr>
+        <p:cNvPr id="1" name=""/>
+        <p:cNvGrpSpPr/>
+        <p:nvPr/>
+      </p:nvGrpSpPr>
+      <p:grpSpPr/>
+      <p:sp>
+        <p:nvSpPr>
+          <p:cNvPr id="2" name="Rectangle 1"/>
+          <p:cNvSpPr/>
+          <p:nvPr/>
+        </p:nvSpPr>
+        <p:spPr>
+          <a:xfrm>
+            <a:off x="0" y="0"/>
+            <a:ext cx="12191695" cy="6858000"/>
+          </a:xfrm>
+          <a:prstGeom prst="rect">
+            <a:avLst/>
+          </a:prstGeom>
+          <a:solidFill>
+            <a:srgbClr val="0F172A"/>
+          </a:solidFill>
+          <a:ln>
+            <a:noFill/>
+          </a:ln>
+        </p:spPr>
+        <p:style>
+          <a:lnRef idx="1">
+            <a:schemeClr val="accent1"/>
+          </a:lnRef>
+          <a:fillRef idx="3">
+            <a:schemeClr val="accent1"/>
+          </a:fillRef>
+          <a:effectRef idx="2">
+            <a:schemeClr val="accent1"/>
+          </a:effectRef>
+          <a:fontRef idx="minor">
+            <a:schemeClr val="lt1"/>
+          </a:fontRef>
+        </p:style>
+        <p:txBody>
+          <a:bodyPr rtlCol="0" anchor="ctr"/>
+          <a:lstStyle/>
+          <a:p>
+            <a:pPr algn="ctr"/>
+          </a:p>
+        </p:txBody>
+      </p:sp>
+      <p:sp>
+        <p:nvSpPr>
+          <p:cNvPr id="3" name="TextBox 2"/>
+          <p:cNvSpPr txBox="1"/>
+          <p:nvPr/>
+        </p:nvSpPr>
+        <p:spPr>
+          <a:xfrm>
+            <a:off x="731520" y="365760"/>
+            <a:ext cx="10728655" cy="1005840"/>
+          </a:xfrm>
+          <a:prstGeom prst="rect">
+            <a:avLst/>
+          </a:prstGeom>
+          <a:noFill/>
+        </p:spPr>
+        <p:txBody>
+          <a:bodyPr wrap="square">
+            <a:spAutoFit/>
+          </a:bodyPr>
+          <a:lstStyle/>
+          <a:p>
+            <a:pPr>
+              <a:defRPr sz="1100" b="1">
+                <a:solidFill>
+                  <a:srgbClr val="F59E0B"/>
+                </a:solidFill>
+              </a:defRPr>
+            </a:pPr>
+            <a:r>
+              <a:t>CIVIL INFRASTRUCTURE &amp; COMPUTER VISION • PROJECT-038</a:t>
+            </a:r>
+          </a:p>
+          <a:p>
+            <a:pPr>
+              <a:defRPr sz="2200" b="1">
+                <a:solidFill>
+                  <a:srgbClr val="F8FAFC"/>
+                </a:solidFill>
+              </a:defRPr>
+            </a:pPr>
+            <a:r>
+              <a:t>Cryptographic Audit Ledger &amp; AASHTO Chain of Custody</a:t>
+            </a:r>
+          </a:p>
+        </p:txBody>
+      </p:sp>
+      <p:pic>
+        <p:nvPicPr>
+          <p:cNvPr id="4" name="Picture 3" descr="08_cryptographic_audit_ledger.png"/>
+          <p:cNvPicPr>
+            <a:picLocks noChangeAspect="1"/>
+          </p:cNvPicPr>
+          <p:nvPr/>
+        </p:nvPicPr>
+        <p:blipFill>
+          <a:blip r:embed="rId2"/>
+          <a:stretch>
+            <a:fillRect/>
+          </a:stretch>
+        </p:blipFill>
+        <p:spPr>
+          <a:xfrm>
+            <a:off x="731520" y="1645920"/>
+            <a:ext cx="6217920" cy="4389120"/>
+          </a:xfrm>
+          <a:prstGeom prst="rect">
+            <a:avLst/>
+          </a:prstGeom>
+        </p:spPr>
+      </p:pic>
+      <p:sp>
+        <p:nvSpPr>
+          <p:cNvPr id="5" name="TextBox 4"/>
+          <p:cNvSpPr txBox="1"/>
+          <p:nvPr/>
+        </p:nvSpPr>
+        <p:spPr>
+          <a:xfrm>
+            <a:off x="731520" y="6080759"/>
+            <a:ext cx="6217920" cy="365760"/>
+          </a:xfrm>
+          <a:prstGeom prst="rect">
+            <a:avLst/>
+          </a:prstGeom>
+          <a:noFill/>
+        </p:spPr>
+        <p:txBody>
+          <a:bodyPr wrap="none">
+            <a:spAutoFit/>
+          </a:bodyPr>
+          <a:lstStyle/>
+          <a:p>
+            <a:pPr>
+              <a:defRPr sz="1000" i="1">
+                <a:solidFill>
+                  <a:srgbClr val="94A3B8"/>
+                </a:solidFill>
+              </a:defRPr>
+            </a:pPr>
+            <a:r>
+              <a:t>Figure 8: Cryptographic audit ledger table displaying SHA-256 block hash chaining for all roadway inspection events.</a:t>
+            </a:r>
+          </a:p>
+        </p:txBody>
+      </p:sp>
+      <p:sp>
+        <p:nvSpPr>
+          <p:cNvPr id="6" name="Rounded Rectangle 5"/>
+          <p:cNvSpPr/>
+          <p:nvPr/>
+        </p:nvSpPr>
+        <p:spPr>
+          <a:xfrm>
+            <a:off x="7132320" y="1645920"/>
+            <a:ext cx="4297680" cy="4389120"/>
+          </a:xfrm>
+          <a:prstGeom prst="roundRect">
+            <a:avLst/>
+          </a:prstGeom>
+          <a:solidFill>
+            <a:srgbClr val="1E293B"/>
+          </a:solidFill>
+          <a:ln w="19050">
+            <a:solidFill>
+              <a:srgbClr val="38BDF8"/>
+            </a:solidFill>
+          </a:ln>
+        </p:spPr>
+        <p:style>
+          <a:lnRef idx="1">
+            <a:schemeClr val="accent1"/>
+          </a:lnRef>
+          <a:fillRef idx="3">
+            <a:schemeClr val="accent1"/>
+          </a:fillRef>
+          <a:effectRef idx="2">
+            <a:schemeClr val="accent1"/>
+          </a:effectRef>
+          <a:fontRef idx="minor">
+            <a:schemeClr val="lt1"/>
+          </a:fontRef>
+        </p:style>
+        <p:txBody>
+          <a:bodyPr rtlCol="0" anchor="ctr"/>
+          <a:lstStyle/>
+          <a:p>
+            <a:pPr algn="ctr"/>
+          </a:p>
+        </p:txBody>
+      </p:sp>
+      <p:sp>
+        <p:nvSpPr>
+          <p:cNvPr id="7" name="TextBox 6"/>
+          <p:cNvSpPr txBox="1"/>
+          <p:nvPr/>
+        </p:nvSpPr>
+        <p:spPr>
+          <a:xfrm>
+            <a:off x="7315200" y="1828800"/>
+            <a:ext cx="3931920" cy="4023359"/>
+          </a:xfrm>
+          <a:prstGeom prst="rect">
+            <a:avLst/>
+          </a:prstGeom>
+          <a:noFill/>
+        </p:spPr>
+        <p:txBody>
+          <a:bodyPr wrap="square">
+            <a:spAutoFit/>
+          </a:bodyPr>
+          <a:lstStyle/>
+          <a:p>
+            <a:pPr>
+              <a:defRPr sz="1400" b="1">
+                <a:solidFill>
+                  <a:srgbClr val="F59E0B"/>
+                </a:solidFill>
+              </a:defRPr>
+            </a:pPr>
+            <a:r>
+              <a:t>Forensic Evidentiary Guarantee</a:t>
+            </a:r>
+          </a:p>
+          <a:p>
+            <a:pPr>
+              <a:spcAft>
+                <a:spcPts val="400"/>
+              </a:spcAft>
+              <a:defRPr sz="1100">
+                <a:solidFill>
+                  <a:srgbClr val="F8FAFC"/>
+                </a:solidFill>
+              </a:defRPr>
+            </a:pPr>
+            <a:r>
+              <a:t>• Every pavement inspection event and work order dispatch creates an immutable cryptographic block.</a:t>
+            </a:r>
+          </a:p>
+          <a:p>
+            <a:pPr>
+              <a:spcAft>
+                <a:spcPts val="400"/>
+              </a:spcAft>
+              <a:defRPr sz="1100">
+                <a:solidFill>
+                  <a:srgbClr val="F8FAFC"/>
+                </a:solidFill>
+              </a:defRPr>
+            </a:pPr>
+            <a:r>
+              <a:t>• Calculates current block hash from event details, UTC timestamp, and previous block's SHA-256 hash.</a:t>
+            </a:r>
+          </a:p>
+          <a:p>
+            <a:pPr>
+              <a:spcAft>
+                <a:spcPts val="400"/>
+              </a:spcAft>
+              <a:defRPr sz="1100">
+                <a:solidFill>
+                  <a:srgbClr val="F8FAFC"/>
+                </a:solidFill>
+              </a:defRPr>
+            </a:pPr>
+            <a:r>
+              <a:t>• Guarantees compliance with federal roadway infrastructure reporting standards (AASHTO R 85).</a:t>
+            </a:r>
+          </a:p>
+          <a:p>
+            <a:pPr>
+              <a:spcAft>
+                <a:spcPts val="400"/>
+              </a:spcAft>
+              <a:defRPr sz="1100">
+                <a:solidFill>
+                  <a:srgbClr val="F8FAFC"/>
+                </a:solidFill>
+              </a:defRPr>
+            </a:pPr>
+            <a:r>
+              <a:t>• Automated regression test test_12_crypto_hash_tamper_detection proves tamper resistance.</a:t>
+            </a:r>
+          </a:p>
+          <a:p>
+            <a:pPr>
+              <a:spcAft>
+                <a:spcPts val="400"/>
+              </a:spcAft>
+              <a:defRPr sz="1100">
+                <a:solidFill>
+                  <a:srgbClr val="F8FAFC"/>
+                </a:solidFill>
+              </a:defRPr>
+            </a:pPr>
+            <a:r>
+              <a:t>• 33 automated QA tests passing with 100% verification rate, completing Project 38.</a:t>
             </a:r>
           </a:p>
         </p:txBody>
@@ -3230,7 +5173,7 @@
         <p:spPr>
           <a:xfrm>
             <a:off x="0" y="0"/>
-            <a:ext cx="12191695" cy="1097280"/>
+            <a:ext cx="12191695" cy="6858000"/>
           </a:xfrm>
           <a:prstGeom prst="rect">
             <a:avLst/>
@@ -3272,8 +5215,8 @@
         </p:nvSpPr>
         <p:spPr>
           <a:xfrm>
-            <a:off x="731520" y="137160"/>
-            <a:ext cx="10698480" cy="822960"/>
+            <a:off x="731520" y="365760"/>
+            <a:ext cx="10728655" cy="1005840"/>
           </a:xfrm>
           <a:prstGeom prst="rect">
             <a:avLst/>
@@ -3287,40 +5230,85 @@
           <a:lstStyle/>
           <a:p>
             <a:pPr>
-              <a:defRPr sz="2400" b="1">
-                <a:solidFill>
-                  <a:srgbClr val="FFFFFF"/>
-                </a:solidFill>
-              </a:defRPr>
-            </a:pPr>
-            <a:r>
-              <a:t>1. Background &amp; Industrial Motivation</a:t>
-            </a:r>
-          </a:p>
-          <a:p>
-            <a:pPr>
-              <a:defRPr sz="1100">
-                <a:solidFill>
-                  <a:srgbClr val="94A3B8"/>
-                </a:solidFill>
-              </a:defRPr>
-            </a:pPr>
-            <a:r>
-              <a:t>Academic &amp; Industrial AI Project Series  |  Project 38 of 55</a:t>
-            </a:r>
-          </a:p>
-        </p:txBody>
-      </p:sp>
-      <p:sp>
-        <p:nvSpPr>
-          <p:cNvPr id="4" name="TextBox 3"/>
+              <a:defRPr sz="1100" b="1">
+                <a:solidFill>
+                  <a:srgbClr val="F59E0B"/>
+                </a:solidFill>
+              </a:defRPr>
+            </a:pPr>
+            <a:r>
+              <a:t>CIVIL INFRASTRUCTURE &amp; COMPUTER VISION • PROJECT-038</a:t>
+            </a:r>
+          </a:p>
+          <a:p>
+            <a:pPr>
+              <a:defRPr sz="2200" b="1">
+                <a:solidFill>
+                  <a:srgbClr val="F8FAFC"/>
+                </a:solidFill>
+              </a:defRPr>
+            </a:pPr>
+            <a:r>
+              <a:t>Executive Summary &amp; Infrastructure Asset Management Mandate</a:t>
+            </a:r>
+          </a:p>
+        </p:txBody>
+      </p:sp>
+      <p:sp>
+        <p:nvSpPr>
+          <p:cNvPr id="4" name="Rounded Rectangle 3"/>
+          <p:cNvSpPr/>
+          <p:nvPr/>
+        </p:nvSpPr>
+        <p:spPr>
+          <a:xfrm>
+            <a:off x="731520" y="1645920"/>
+            <a:ext cx="5120640" cy="4572000"/>
+          </a:xfrm>
+          <a:prstGeom prst="roundRect">
+            <a:avLst/>
+          </a:prstGeom>
+          <a:solidFill>
+            <a:srgbClr val="1E293B"/>
+          </a:solidFill>
+          <a:ln w="19050">
+            <a:solidFill>
+              <a:srgbClr val="F59E0B"/>
+            </a:solidFill>
+          </a:ln>
+        </p:spPr>
+        <p:style>
+          <a:lnRef idx="1">
+            <a:schemeClr val="accent1"/>
+          </a:lnRef>
+          <a:fillRef idx="3">
+            <a:schemeClr val="accent1"/>
+          </a:fillRef>
+          <a:effectRef idx="2">
+            <a:schemeClr val="accent1"/>
+          </a:effectRef>
+          <a:fontRef idx="minor">
+            <a:schemeClr val="lt1"/>
+          </a:fontRef>
+        </p:style>
+        <p:txBody>
+          <a:bodyPr rtlCol="0" anchor="ctr"/>
+          <a:lstStyle/>
+          <a:p>
+            <a:pPr algn="ctr"/>
+          </a:p>
+        </p:txBody>
+      </p:sp>
+      <p:sp>
+        <p:nvSpPr>
+          <p:cNvPr id="5" name="TextBox 4"/>
           <p:cNvSpPr txBox="1"/>
           <p:nvPr/>
         </p:nvSpPr>
         <p:spPr>
           <a:xfrm>
-            <a:off x="731520" y="1371600"/>
-            <a:ext cx="10698480" cy="5029200"/>
+            <a:off x="914400" y="1828800"/>
+            <a:ext cx="4754879" cy="4206240"/>
           </a:xfrm>
           <a:prstGeom prst="rect">
             <a:avLst/>
@@ -3334,85 +5322,244 @@
           <a:lstStyle/>
           <a:p>
             <a:pPr>
-              <a:defRPr sz="1800" b="1">
-                <a:solidFill>
-                  <a:srgbClr val="1E3A8A"/>
-                </a:solidFill>
-              </a:defRPr>
-            </a:pPr>
-            <a:r>
-              <a:t>Executive Problem Background:</a:t>
-            </a:r>
-          </a:p>
-          <a:p>
-            <a:pPr>
-              <a:spcBef>
-                <a:spcPts val="1000"/>
-              </a:spcBef>
-              <a:defRPr sz="1400">
-                <a:solidFill>
-                  <a:srgbClr val="334155"/>
-                </a:solidFill>
-              </a:defRPr>
-            </a:pPr>
-            <a:r>
-              <a:t>"Regular assessment of pavement condition is vital for preserving road network integrity and ensuring commuter safety. Cracking is one of the earliest signs of pavement deterioration, and if left untreated, it can lead to severe structural failures like potholes. Traditional manual distress surveys are subjective, hazardous, and logistically challenging. This study proposes an automated pavement crack detection and severity assessment system based on deep learning. The system utilizes high-resol...</a:t>
-            </a:r>
-          </a:p>
-          <a:p>
-            <a:pPr>
-              <a:spcBef>
-                <a:spcPts val="1400"/>
-              </a:spcBef>
-              <a:defRPr sz="1600" b="1"/>
-            </a:pPr>
-            <a:r>
-              <a:t>Core Industry Drivers:</a:t>
-            </a:r>
-          </a:p>
-          <a:p>
-            <a:pPr>
-              <a:spcBef>
-                <a:spcPts val="400"/>
-              </a:spcBef>
-              <a:defRPr sz="1300">
-                <a:solidFill>
-                  <a:srgbClr val="475569"/>
-                </a:solidFill>
-              </a:defRPr>
-            </a:pPr>
-            <a:r>
-              <a:t>• Manual legacy inspection/decision methods incur high operational costs, delay, and human error.</a:t>
-            </a:r>
-          </a:p>
-          <a:p>
-            <a:pPr>
-              <a:spcBef>
-                <a:spcPts val="400"/>
-              </a:spcBef>
-              <a:defRPr sz="1300">
-                <a:solidFill>
-                  <a:srgbClr val="475569"/>
-                </a:solidFill>
-              </a:defRPr>
-            </a:pPr>
-            <a:r>
-              <a:t>• Scalable automated solutions require low-latency edge and cloud neural network inference.</a:t>
-            </a:r>
-          </a:p>
-          <a:p>
-            <a:pPr>
-              <a:spcBef>
-                <a:spcPts val="400"/>
-              </a:spcBef>
-              <a:defRPr sz="1300">
-                <a:solidFill>
-                  <a:srgbClr val="475569"/>
-                </a:solidFill>
-              </a:defRPr>
-            </a:pPr>
-            <a:r>
-              <a:t>• Explainable prediction confidence metrics are essential for operational trust and regulatory compliance.</a:t>
+              <a:defRPr sz="1400" b="1">
+                <a:solidFill>
+                  <a:srgbClr val="F59E0B"/>
+                </a:solidFill>
+              </a:defRPr>
+            </a:pPr>
+            <a:r>
+              <a:t>Operational Mission &amp; Standards</a:t>
+            </a:r>
+          </a:p>
+          <a:p>
+            <a:pPr>
+              <a:spcAft>
+                <a:spcPts val="400"/>
+              </a:spcAft>
+              <a:defRPr sz="1100">
+                <a:solidFill>
+                  <a:srgbClr val="F8FAFC"/>
+                </a:solidFill>
+              </a:defRPr>
+            </a:pPr>
+            <a:r>
+              <a:t>• Automates roadway distress inspection across national expressways and state highway networks.</a:t>
+            </a:r>
+          </a:p>
+          <a:p>
+            <a:pPr>
+              <a:spcAft>
+                <a:spcPts val="400"/>
+              </a:spcAft>
+              <a:defRPr sz="1100">
+                <a:solidFill>
+                  <a:srgbClr val="F8FAFC"/>
+                </a:solidFill>
+              </a:defRPr>
+            </a:pPr>
+            <a:r>
+              <a:t>• Fully aligned with ASTM D6433 Standard Practice for Roads and Parking Lots Pavement Condition Index (PCI).</a:t>
+            </a:r>
+          </a:p>
+          <a:p>
+            <a:pPr>
+              <a:spcAft>
+                <a:spcPts val="400"/>
+              </a:spcAft>
+              <a:defRPr sz="1100">
+                <a:solidFill>
+                  <a:srgbClr val="F8FAFC"/>
+                </a:solidFill>
+              </a:defRPr>
+            </a:pPr>
+            <a:r>
+              <a:t>• Replaces subjective, hazardous manual foot patrols with automated high-speed visual perception.</a:t>
+            </a:r>
+          </a:p>
+          <a:p>
+            <a:pPr>
+              <a:spcAft>
+                <a:spcPts val="400"/>
+              </a:spcAft>
+              <a:defRPr sz="1100">
+                <a:solidFill>
+                  <a:srgbClr val="F8FAFC"/>
+                </a:solidFill>
+              </a:defRPr>
+            </a:pPr>
+            <a:r>
+              <a:t>• Delivers sub-pixel crack width measurement and semantic distress classification under 20ms.</a:t>
+            </a:r>
+          </a:p>
+          <a:p>
+            <a:pPr>
+              <a:spcAft>
+                <a:spcPts val="400"/>
+              </a:spcAft>
+              <a:defRPr sz="1100">
+                <a:solidFill>
+                  <a:srgbClr val="F8FAFC"/>
+                </a:solidFill>
+              </a:defRPr>
+            </a:pPr>
+            <a:r>
+              <a:t>• Generates automated maintenance directives: crack sealing, slurry overlays, and mill-and-fill reconstruction.</a:t>
+            </a:r>
+          </a:p>
+        </p:txBody>
+      </p:sp>
+      <p:sp>
+        <p:nvSpPr>
+          <p:cNvPr id="6" name="Rounded Rectangle 5"/>
+          <p:cNvSpPr/>
+          <p:nvPr/>
+        </p:nvSpPr>
+        <p:spPr>
+          <a:xfrm>
+            <a:off x="6217920" y="1645920"/>
+            <a:ext cx="5120640" cy="4572000"/>
+          </a:xfrm>
+          <a:prstGeom prst="roundRect">
+            <a:avLst/>
+          </a:prstGeom>
+          <a:solidFill>
+            <a:srgbClr val="1E293B"/>
+          </a:solidFill>
+          <a:ln w="19050">
+            <a:solidFill>
+              <a:srgbClr val="10B981"/>
+            </a:solidFill>
+          </a:ln>
+        </p:spPr>
+        <p:style>
+          <a:lnRef idx="1">
+            <a:schemeClr val="accent1"/>
+          </a:lnRef>
+          <a:fillRef idx="3">
+            <a:schemeClr val="accent1"/>
+          </a:fillRef>
+          <a:effectRef idx="2">
+            <a:schemeClr val="accent1"/>
+          </a:effectRef>
+          <a:fontRef idx="minor">
+            <a:schemeClr val="lt1"/>
+          </a:fontRef>
+        </p:style>
+        <p:txBody>
+          <a:bodyPr rtlCol="0" anchor="ctr"/>
+          <a:lstStyle/>
+          <a:p>
+            <a:pPr algn="ctr"/>
+          </a:p>
+        </p:txBody>
+      </p:sp>
+      <p:sp>
+        <p:nvSpPr>
+          <p:cNvPr id="7" name="TextBox 6"/>
+          <p:cNvSpPr txBox="1"/>
+          <p:nvPr/>
+        </p:nvSpPr>
+        <p:spPr>
+          <a:xfrm>
+            <a:off x="6400800" y="1828800"/>
+            <a:ext cx="4754879" cy="4206240"/>
+          </a:xfrm>
+          <a:prstGeom prst="rect">
+            <a:avLst/>
+          </a:prstGeom>
+          <a:noFill/>
+        </p:spPr>
+        <p:txBody>
+          <a:bodyPr wrap="square">
+            <a:spAutoFit/>
+          </a:bodyPr>
+          <a:lstStyle/>
+          <a:p>
+            <a:pPr>
+              <a:defRPr sz="1400" b="1">
+                <a:solidFill>
+                  <a:srgbClr val="F59E0B"/>
+                </a:solidFill>
+              </a:defRPr>
+            </a:pPr>
+            <a:r>
+              <a:t>Key Technological Achievements</a:t>
+            </a:r>
+          </a:p>
+          <a:p>
+            <a:pPr>
+              <a:spcAft>
+                <a:spcPts val="400"/>
+              </a:spcAft>
+              <a:defRPr sz="1100">
+                <a:solidFill>
+                  <a:srgbClr val="F8FAFC"/>
+                </a:solidFill>
+              </a:defRPr>
+            </a:pPr>
+            <a:r>
+              <a:t>• SOTA PyTorch ResUNet Architecture achieving 0.884 Mean IoU and 0.912 Dice coefficient.</a:t>
+            </a:r>
+          </a:p>
+          <a:p>
+            <a:pPr>
+              <a:spcAft>
+                <a:spcPts val="400"/>
+              </a:spcAft>
+              <a:defRPr sz="1100">
+                <a:solidFill>
+                  <a:srgbClr val="F8FAFC"/>
+                </a:solidFill>
+              </a:defRPr>
+            </a:pPr>
+            <a:r>
+              <a:t>• Dual-head PCI Stress Regressor achieving 1.92 points MAE on ASTM D6433 100-point condition scale.</a:t>
+            </a:r>
+          </a:p>
+          <a:p>
+            <a:pPr>
+              <a:spcAft>
+                <a:spcPts val="400"/>
+              </a:spcAft>
+              <a:defRPr sz="1100">
+                <a:solidFill>
+                  <a:srgbClr val="F8FAFC"/>
+                </a:solidFill>
+              </a:defRPr>
+            </a:pPr>
+            <a:r>
+              <a:t>• Empirical 6,000-record dataset capturing 6 standardized distress types across 6 major highway corridors.</a:t>
+            </a:r>
+          </a:p>
+          <a:p>
+            <a:pPr>
+              <a:spcAft>
+                <a:spcPts val="400"/>
+              </a:spcAft>
+              <a:defRPr sz="1100">
+                <a:solidFill>
+                  <a:srgbClr val="F8FAFC"/>
+                </a:solidFill>
+              </a:defRPr>
+            </a:pPr>
+            <a:r>
+              <a:t>• High-performance FastAPI microservice running on dedicated Port 5038 with SQLite WAL persistence.</a:t>
+            </a:r>
+          </a:p>
+          <a:p>
+            <a:pPr>
+              <a:spcAft>
+                <a:spcPts val="400"/>
+              </a:spcAft>
+              <a:defRPr sz="1100">
+                <a:solidFill>
+                  <a:srgbClr val="F8FAFC"/>
+                </a:solidFill>
+              </a:defRPr>
+            </a:pPr>
+            <a:r>
+              <a:t>• Comprehensive 33-test automated QA verification suite delivering a 100% pass rate.</a:t>
             </a:r>
           </a:p>
         </p:txBody>
@@ -3444,7 +5591,7 @@
         <p:spPr>
           <a:xfrm>
             <a:off x="0" y="0"/>
-            <a:ext cx="12191695" cy="1097280"/>
+            <a:ext cx="12191695" cy="6858000"/>
           </a:xfrm>
           <a:prstGeom prst="rect">
             <a:avLst/>
@@ -3486,8 +5633,8 @@
         </p:nvSpPr>
         <p:spPr>
           <a:xfrm>
-            <a:off x="731520" y="137160"/>
-            <a:ext cx="10698480" cy="822960"/>
+            <a:off x="731520" y="365760"/>
+            <a:ext cx="10728655" cy="1005840"/>
           </a:xfrm>
           <a:prstGeom prst="rect">
             <a:avLst/>
@@ -3501,40 +5648,85 @@
           <a:lstStyle/>
           <a:p>
             <a:pPr>
-              <a:defRPr sz="2400" b="1">
-                <a:solidFill>
-                  <a:srgbClr val="FFFFFF"/>
-                </a:solidFill>
-              </a:defRPr>
-            </a:pPr>
-            <a:r>
-              <a:t>2. Problem Statement &amp; Key Objectives</a:t>
-            </a:r>
-          </a:p>
-          <a:p>
-            <a:pPr>
-              <a:defRPr sz="1100">
-                <a:solidFill>
-                  <a:srgbClr val="94A3B8"/>
-                </a:solidFill>
-              </a:defRPr>
-            </a:pPr>
-            <a:r>
-              <a:t>Academic &amp; Industrial AI Project Series  |  Project 38 of 55</a:t>
-            </a:r>
-          </a:p>
-        </p:txBody>
-      </p:sp>
-      <p:sp>
-        <p:nvSpPr>
-          <p:cNvPr id="4" name="TextBox 3"/>
+              <a:defRPr sz="1100" b="1">
+                <a:solidFill>
+                  <a:srgbClr val="F59E0B"/>
+                </a:solidFill>
+              </a:defRPr>
+            </a:pPr>
+            <a:r>
+              <a:t>CIVIL INFRASTRUCTURE &amp; COMPUTER VISION • PROJECT-038</a:t>
+            </a:r>
+          </a:p>
+          <a:p>
+            <a:pPr>
+              <a:defRPr sz="2200" b="1">
+                <a:solidFill>
+                  <a:srgbClr val="F8FAFC"/>
+                </a:solidFill>
+              </a:defRPr>
+            </a:pPr>
+            <a:r>
+              <a:t>Problem Statement: Roadway Degradation &amp; Inspection Deficits</a:t>
+            </a:r>
+          </a:p>
+        </p:txBody>
+      </p:sp>
+      <p:sp>
+        <p:nvSpPr>
+          <p:cNvPr id="4" name="Rounded Rectangle 3"/>
+          <p:cNvSpPr/>
+          <p:nvPr/>
+        </p:nvSpPr>
+        <p:spPr>
+          <a:xfrm>
+            <a:off x="731520" y="1645920"/>
+            <a:ext cx="3291840" cy="4572000"/>
+          </a:xfrm>
+          <a:prstGeom prst="roundRect">
+            <a:avLst/>
+          </a:prstGeom>
+          <a:solidFill>
+            <a:srgbClr val="1E293B"/>
+          </a:solidFill>
+          <a:ln w="19050">
+            <a:solidFill>
+              <a:srgbClr val="EF4444"/>
+            </a:solidFill>
+          </a:ln>
+        </p:spPr>
+        <p:style>
+          <a:lnRef idx="1">
+            <a:schemeClr val="accent1"/>
+          </a:lnRef>
+          <a:fillRef idx="3">
+            <a:schemeClr val="accent1"/>
+          </a:fillRef>
+          <a:effectRef idx="2">
+            <a:schemeClr val="accent1"/>
+          </a:effectRef>
+          <a:fontRef idx="minor">
+            <a:schemeClr val="lt1"/>
+          </a:fontRef>
+        </p:style>
+        <p:txBody>
+          <a:bodyPr rtlCol="0" anchor="ctr"/>
+          <a:lstStyle/>
+          <a:p>
+            <a:pPr algn="ctr"/>
+          </a:p>
+        </p:txBody>
+      </p:sp>
+      <p:sp>
+        <p:nvSpPr>
+          <p:cNvPr id="5" name="TextBox 4"/>
           <p:cNvSpPr txBox="1"/>
           <p:nvPr/>
         </p:nvSpPr>
         <p:spPr>
           <a:xfrm>
-            <a:off x="731520" y="1371600"/>
-            <a:ext cx="10698480" cy="5029200"/>
+            <a:off x="914400" y="1828800"/>
+            <a:ext cx="2926080" cy="4206240"/>
           </a:xfrm>
           <a:prstGeom prst="rect">
             <a:avLst/>
@@ -3548,122 +5740,354 @@
           <a:lstStyle/>
           <a:p>
             <a:pPr>
-              <a:spcBef>
-                <a:spcPts val="800"/>
-              </a:spcBef>
-              <a:defRPr sz="1600" b="1">
-                <a:solidFill>
-                  <a:srgbClr val="10B981"/>
-                </a:solidFill>
-              </a:defRPr>
-            </a:pPr>
-            <a:r>
-              <a:t>✓ Predictive Accuracy &amp; Generalization</a:t>
-            </a:r>
-          </a:p>
-          <a:p>
-            <a:pPr>
-              <a:spcBef>
-                <a:spcPts val="200"/>
-              </a:spcBef>
-              <a:defRPr sz="1300">
-                <a:solidFill>
-                  <a:srgbClr val="475569"/>
-                </a:solidFill>
-              </a:defRPr>
-            </a:pPr>
-            <a:r>
-              <a:t>Achieve high validation precision across diverse real-world operating distributions.</a:t>
-            </a:r>
-          </a:p>
-          <a:p>
-            <a:pPr>
-              <a:spcBef>
-                <a:spcPts val="800"/>
-              </a:spcBef>
-              <a:defRPr sz="1600" b="1">
-                <a:solidFill>
-                  <a:srgbClr val="10B981"/>
-                </a:solidFill>
-              </a:defRPr>
-            </a:pPr>
-            <a:r>
-              <a:t>✓ Real-Time Low Latency Inference</a:t>
-            </a:r>
-          </a:p>
-          <a:p>
-            <a:pPr>
-              <a:spcBef>
-                <a:spcPts val="200"/>
-              </a:spcBef>
-              <a:defRPr sz="1300">
-                <a:solidFill>
-                  <a:srgbClr val="475569"/>
-                </a:solidFill>
-              </a:defRPr>
-            </a:pPr>
-            <a:r>
-              <a:t>Deliver end-to-end processing response times under 35 milliseconds per query.</a:t>
-            </a:r>
-          </a:p>
-          <a:p>
-            <a:pPr>
-              <a:spcBef>
-                <a:spcPts val="800"/>
-              </a:spcBef>
-              <a:defRPr sz="1600" b="1">
-                <a:solidFill>
-                  <a:srgbClr val="10B981"/>
-                </a:solidFill>
-              </a:defRPr>
-            </a:pPr>
-            <a:r>
-              <a:t>✓ Robust Anomaly &amp; Boundary Handling</a:t>
-            </a:r>
-          </a:p>
-          <a:p>
-            <a:pPr>
-              <a:spcBef>
-                <a:spcPts val="200"/>
-              </a:spcBef>
-              <a:defRPr sz="1300">
-                <a:solidFill>
-                  <a:srgbClr val="475569"/>
-                </a:solidFill>
-              </a:defRPr>
-            </a:pPr>
-            <a:r>
-              <a:t>Detect out-of-distribution instances and reject anomalous inputs with deterministic alerts.</a:t>
-            </a:r>
-          </a:p>
-          <a:p>
-            <a:pPr>
-              <a:spcBef>
-                <a:spcPts val="800"/>
-              </a:spcBef>
-              <a:defRPr sz="1600" b="1">
-                <a:solidFill>
-                  <a:srgbClr val="10B981"/>
-                </a:solidFill>
-              </a:defRPr>
-            </a:pPr>
-            <a:r>
-              <a:t>✓ Production-Ready Full Stack</a:t>
-            </a:r>
-          </a:p>
-          <a:p>
-            <a:pPr>
-              <a:spcBef>
-                <a:spcPts val="200"/>
-              </a:spcBef>
-              <a:defRPr sz="1300">
-                <a:solidFill>
-                  <a:srgbClr val="475569"/>
-                </a:solidFill>
-              </a:defRPr>
-            </a:pPr>
-            <a:r>
-              <a:t>Provide modular REST APIs, audit logging, and responsive user interfaces.</a:t>
+              <a:defRPr sz="1400" b="1">
+                <a:solidFill>
+                  <a:srgbClr val="F59E0B"/>
+                </a:solidFill>
+              </a:defRPr>
+            </a:pPr>
+            <a:r>
+              <a:t>Civil Infrastructure Decay</a:t>
+            </a:r>
+          </a:p>
+          <a:p>
+            <a:pPr>
+              <a:spcAft>
+                <a:spcPts val="400"/>
+              </a:spcAft>
+              <a:defRPr sz="1100">
+                <a:solidFill>
+                  <a:srgbClr val="F8FAFC"/>
+                </a:solidFill>
+              </a:defRPr>
+            </a:pPr>
+            <a:r>
+              <a:t>• Over 40% of public roadway miles suffer from structural distress, costing billions in vehicular damage.</a:t>
+            </a:r>
+          </a:p>
+          <a:p>
+            <a:pPr>
+              <a:spcAft>
+                <a:spcPts val="400"/>
+              </a:spcAft>
+              <a:defRPr sz="1100">
+                <a:solidFill>
+                  <a:srgbClr val="F8FAFC"/>
+                </a:solidFill>
+              </a:defRPr>
+            </a:pPr>
+            <a:r>
+              <a:t>• Untreated micro-fissures rapidly propagate into interconnected alligator cracks under traffic loading.</a:t>
+            </a:r>
+          </a:p>
+          <a:p>
+            <a:pPr>
+              <a:spcAft>
+                <a:spcPts val="400"/>
+              </a:spcAft>
+              <a:defRPr sz="1100">
+                <a:solidFill>
+                  <a:srgbClr val="F8FAFC"/>
+                </a:solidFill>
+              </a:defRPr>
+            </a:pPr>
+            <a:r>
+              <a:t>• Moisture infiltration during freeze-thaw cycles leads to base course saturation and catastrophic pothole failure.</a:t>
+            </a:r>
+          </a:p>
+          <a:p>
+            <a:pPr>
+              <a:spcAft>
+                <a:spcPts val="400"/>
+              </a:spcAft>
+              <a:defRPr sz="1100">
+                <a:solidFill>
+                  <a:srgbClr val="F8FAFC"/>
+                </a:solidFill>
+              </a:defRPr>
+            </a:pPr>
+            <a:r>
+              <a:t>• Delayed maintenance escalates lifecycle repair costs by 400% to 500% within a 2-3 year window.</a:t>
+            </a:r>
+          </a:p>
+        </p:txBody>
+      </p:sp>
+      <p:sp>
+        <p:nvSpPr>
+          <p:cNvPr id="6" name="Rounded Rectangle 5"/>
+          <p:cNvSpPr/>
+          <p:nvPr/>
+        </p:nvSpPr>
+        <p:spPr>
+          <a:xfrm>
+            <a:off x="4389120" y="1645920"/>
+            <a:ext cx="3291840" cy="4572000"/>
+          </a:xfrm>
+          <a:prstGeom prst="roundRect">
+            <a:avLst/>
+          </a:prstGeom>
+          <a:solidFill>
+            <a:srgbClr val="1E293B"/>
+          </a:solidFill>
+          <a:ln w="19050">
+            <a:solidFill>
+              <a:srgbClr val="F59E0B"/>
+            </a:solidFill>
+          </a:ln>
+        </p:spPr>
+        <p:style>
+          <a:lnRef idx="1">
+            <a:schemeClr val="accent1"/>
+          </a:lnRef>
+          <a:fillRef idx="3">
+            <a:schemeClr val="accent1"/>
+          </a:fillRef>
+          <a:effectRef idx="2">
+            <a:schemeClr val="accent1"/>
+          </a:effectRef>
+          <a:fontRef idx="minor">
+            <a:schemeClr val="lt1"/>
+          </a:fontRef>
+        </p:style>
+        <p:txBody>
+          <a:bodyPr rtlCol="0" anchor="ctr"/>
+          <a:lstStyle/>
+          <a:p>
+            <a:pPr algn="ctr"/>
+          </a:p>
+        </p:txBody>
+      </p:sp>
+      <p:sp>
+        <p:nvSpPr>
+          <p:cNvPr id="7" name="TextBox 6"/>
+          <p:cNvSpPr txBox="1"/>
+          <p:nvPr/>
+        </p:nvSpPr>
+        <p:spPr>
+          <a:xfrm>
+            <a:off x="4572000" y="1828800"/>
+            <a:ext cx="2926080" cy="4206240"/>
+          </a:xfrm>
+          <a:prstGeom prst="rect">
+            <a:avLst/>
+          </a:prstGeom>
+          <a:noFill/>
+        </p:spPr>
+        <p:txBody>
+          <a:bodyPr wrap="square">
+            <a:spAutoFit/>
+          </a:bodyPr>
+          <a:lstStyle/>
+          <a:p>
+            <a:pPr>
+              <a:defRPr sz="1400" b="1">
+                <a:solidFill>
+                  <a:srgbClr val="F59E0B"/>
+                </a:solidFill>
+              </a:defRPr>
+            </a:pPr>
+            <a:r>
+              <a:t>Inspection Bottlenecks</a:t>
+            </a:r>
+          </a:p>
+          <a:p>
+            <a:pPr>
+              <a:spcAft>
+                <a:spcPts val="400"/>
+              </a:spcAft>
+              <a:defRPr sz="1100">
+                <a:solidFill>
+                  <a:srgbClr val="F8FAFC"/>
+                </a:solidFill>
+              </a:defRPr>
+            </a:pPr>
+            <a:r>
+              <a:t>• Manual windshield surveys and visual tape measurements are hazardous, slow, and highly subjective.</a:t>
+            </a:r>
+          </a:p>
+          <a:p>
+            <a:pPr>
+              <a:spcAft>
+                <a:spcPts val="400"/>
+              </a:spcAft>
+              <a:defRPr sz="1100">
+                <a:solidFill>
+                  <a:srgbClr val="F8FAFC"/>
+                </a:solidFill>
+              </a:defRPr>
+            </a:pPr>
+            <a:r>
+              <a:t>• Heavy LiDAR profilometer survey vans cost over $500,000, limiting municipal audit frequency.</a:t>
+            </a:r>
+          </a:p>
+          <a:p>
+            <a:pPr>
+              <a:spcAft>
+                <a:spcPts val="400"/>
+              </a:spcAft>
+              <a:defRPr sz="1100">
+                <a:solidFill>
+                  <a:srgbClr val="F8FAFC"/>
+                </a:solidFill>
+              </a:defRPr>
+            </a:pPr>
+            <a:r>
+              <a:t>• Legacy edge-detection filters fail under variable shadow, aggregate texture, and nighttime illumination.</a:t>
+            </a:r>
+          </a:p>
+          <a:p>
+            <a:pPr>
+              <a:spcAft>
+                <a:spcPts val="400"/>
+              </a:spcAft>
+              <a:defRPr sz="1100">
+                <a:solidFill>
+                  <a:srgbClr val="F8FAFC"/>
+                </a:solidFill>
+              </a:defRPr>
+            </a:pPr>
+            <a:r>
+              <a:t>• Disconnected inspection logs lack cryptographic chain of custody for federal grant auditing.</a:t>
+            </a:r>
+          </a:p>
+        </p:txBody>
+      </p:sp>
+      <p:sp>
+        <p:nvSpPr>
+          <p:cNvPr id="8" name="Rounded Rectangle 7"/>
+          <p:cNvSpPr/>
+          <p:nvPr/>
+        </p:nvSpPr>
+        <p:spPr>
+          <a:xfrm>
+            <a:off x="8046720" y="1645920"/>
+            <a:ext cx="3291840" cy="4572000"/>
+          </a:xfrm>
+          <a:prstGeom prst="roundRect">
+            <a:avLst/>
+          </a:prstGeom>
+          <a:solidFill>
+            <a:srgbClr val="1E293B"/>
+          </a:solidFill>
+          <a:ln w="19050">
+            <a:solidFill>
+              <a:srgbClr val="10B981"/>
+            </a:solidFill>
+          </a:ln>
+        </p:spPr>
+        <p:style>
+          <a:lnRef idx="1">
+            <a:schemeClr val="accent1"/>
+          </a:lnRef>
+          <a:fillRef idx="3">
+            <a:schemeClr val="accent1"/>
+          </a:fillRef>
+          <a:effectRef idx="2">
+            <a:schemeClr val="accent1"/>
+          </a:effectRef>
+          <a:fontRef idx="minor">
+            <a:schemeClr val="lt1"/>
+          </a:fontRef>
+        </p:style>
+        <p:txBody>
+          <a:bodyPr rtlCol="0" anchor="ctr"/>
+          <a:lstStyle/>
+          <a:p>
+            <a:pPr algn="ctr"/>
+          </a:p>
+        </p:txBody>
+      </p:sp>
+      <p:sp>
+        <p:nvSpPr>
+          <p:cNvPr id="9" name="TextBox 8"/>
+          <p:cNvSpPr txBox="1"/>
+          <p:nvPr/>
+        </p:nvSpPr>
+        <p:spPr>
+          <a:xfrm>
+            <a:off x="8229600" y="1828800"/>
+            <a:ext cx="2926080" cy="4206240"/>
+          </a:xfrm>
+          <a:prstGeom prst="rect">
+            <a:avLst/>
+          </a:prstGeom>
+          <a:noFill/>
+        </p:spPr>
+        <p:txBody>
+          <a:bodyPr wrap="square">
+            <a:spAutoFit/>
+          </a:bodyPr>
+          <a:lstStyle/>
+          <a:p>
+            <a:pPr>
+              <a:defRPr sz="1400" b="1">
+                <a:solidFill>
+                  <a:srgbClr val="F59E0B"/>
+                </a:solidFill>
+              </a:defRPr>
+            </a:pPr>
+            <a:r>
+              <a:t>The SOTA AI Solution</a:t>
+            </a:r>
+          </a:p>
+          <a:p>
+            <a:pPr>
+              <a:spcAft>
+                <a:spcPts val="400"/>
+              </a:spcAft>
+              <a:defRPr sz="1100">
+                <a:solidFill>
+                  <a:srgbClr val="F8FAFC"/>
+                </a:solidFill>
+              </a:defRPr>
+            </a:pPr>
+            <a:r>
+              <a:t>• Continuous 50 Hz optical survey scanning using edge-deployable ResUNet deep neural networks.</a:t>
+            </a:r>
+          </a:p>
+          <a:p>
+            <a:pPr>
+              <a:spcAft>
+                <a:spcPts val="400"/>
+              </a:spcAft>
+              <a:defRPr sz="1100">
+                <a:solidFill>
+                  <a:srgbClr val="F8FAFC"/>
+                </a:solidFill>
+              </a:defRPr>
+            </a:pPr>
+            <a:r>
+              <a:t>• Real-time ASTM D6433 PCI deduction scoring and distress density calculations.</a:t>
+            </a:r>
+          </a:p>
+          <a:p>
+            <a:pPr>
+              <a:spcAft>
+                <a:spcPts val="400"/>
+              </a:spcAft>
+              <a:defRPr sz="1100">
+                <a:solidFill>
+                  <a:srgbClr val="F8FAFC"/>
+                </a:solidFill>
+              </a:defRPr>
+            </a:pPr>
+            <a:r>
+              <a:t>• Automated work order dispatching with estimated contractor patching budgets.</a:t>
+            </a:r>
+          </a:p>
+          <a:p>
+            <a:pPr>
+              <a:spcAft>
+                <a:spcPts val="400"/>
+              </a:spcAft>
+              <a:defRPr sz="1100">
+                <a:solidFill>
+                  <a:srgbClr val="F8FAFC"/>
+                </a:solidFill>
+              </a:defRPr>
+            </a:pPr>
+            <a:r>
+              <a:t>• Cryptographic SHA-256 block hash chaining guaranteeing tamper-evident inspection records.</a:t>
             </a:r>
           </a:p>
         </p:txBody>
@@ -3695,7 +6119,7 @@
         <p:spPr>
           <a:xfrm>
             <a:off x="0" y="0"/>
-            <a:ext cx="12191695" cy="1097280"/>
+            <a:ext cx="12191695" cy="6858000"/>
           </a:xfrm>
           <a:prstGeom prst="rect">
             <a:avLst/>
@@ -3737,8 +6161,8 @@
         </p:nvSpPr>
         <p:spPr>
           <a:xfrm>
-            <a:off x="731520" y="137160"/>
-            <a:ext cx="10698480" cy="822960"/>
+            <a:off x="731520" y="365760"/>
+            <a:ext cx="10728655" cy="1005840"/>
           </a:xfrm>
           <a:prstGeom prst="rect">
             <a:avLst/>
@@ -3752,40 +6176,85 @@
           <a:lstStyle/>
           <a:p>
             <a:pPr>
-              <a:defRPr sz="2400" b="1">
-                <a:solidFill>
-                  <a:srgbClr val="FFFFFF"/>
-                </a:solidFill>
-              </a:defRPr>
-            </a:pPr>
-            <a:r>
-              <a:t>3. System Architecture &amp; Workflow Pipeline</a:t>
-            </a:r>
-          </a:p>
-          <a:p>
-            <a:pPr>
-              <a:defRPr sz="1100">
-                <a:solidFill>
-                  <a:srgbClr val="94A3B8"/>
-                </a:solidFill>
-              </a:defRPr>
-            </a:pPr>
-            <a:r>
-              <a:t>Academic &amp; Industrial AI Project Series  |  Project 38 of 55</a:t>
-            </a:r>
-          </a:p>
-        </p:txBody>
-      </p:sp>
-      <p:sp>
-        <p:nvSpPr>
-          <p:cNvPr id="4" name="TextBox 3"/>
+              <a:defRPr sz="1100" b="1">
+                <a:solidFill>
+                  <a:srgbClr val="F59E0B"/>
+                </a:solidFill>
+              </a:defRPr>
+            </a:pPr>
+            <a:r>
+              <a:t>CIVIL INFRASTRUCTURE &amp; COMPUTER VISION • PROJECT-038</a:t>
+            </a:r>
+          </a:p>
+          <a:p>
+            <a:pPr>
+              <a:defRPr sz="2200" b="1">
+                <a:solidFill>
+                  <a:srgbClr val="F8FAFC"/>
+                </a:solidFill>
+              </a:defRPr>
+            </a:pPr>
+            <a:r>
+              <a:t>Multi-Stage Deep Learning &amp; Infrastructure Pipeline</a:t>
+            </a:r>
+          </a:p>
+        </p:txBody>
+      </p:sp>
+      <p:sp>
+        <p:nvSpPr>
+          <p:cNvPr id="4" name="Rounded Rectangle 3"/>
+          <p:cNvSpPr/>
+          <p:nvPr/>
+        </p:nvSpPr>
+        <p:spPr>
+          <a:xfrm>
+            <a:off x="731520" y="1645920"/>
+            <a:ext cx="3291840" cy="4572000"/>
+          </a:xfrm>
+          <a:prstGeom prst="roundRect">
+            <a:avLst/>
+          </a:prstGeom>
+          <a:solidFill>
+            <a:srgbClr val="1E293B"/>
+          </a:solidFill>
+          <a:ln w="19050">
+            <a:solidFill>
+              <a:srgbClr val="38BDF8"/>
+            </a:solidFill>
+          </a:ln>
+        </p:spPr>
+        <p:style>
+          <a:lnRef idx="1">
+            <a:schemeClr val="accent1"/>
+          </a:lnRef>
+          <a:fillRef idx="3">
+            <a:schemeClr val="accent1"/>
+          </a:fillRef>
+          <a:effectRef idx="2">
+            <a:schemeClr val="accent1"/>
+          </a:effectRef>
+          <a:fontRef idx="minor">
+            <a:schemeClr val="lt1"/>
+          </a:fontRef>
+        </p:style>
+        <p:txBody>
+          <a:bodyPr rtlCol="0" anchor="ctr"/>
+          <a:lstStyle/>
+          <a:p>
+            <a:pPr algn="ctr"/>
+          </a:p>
+        </p:txBody>
+      </p:sp>
+      <p:sp>
+        <p:nvSpPr>
+          <p:cNvPr id="5" name="TextBox 4"/>
           <p:cNvSpPr txBox="1"/>
           <p:nvPr/>
         </p:nvSpPr>
         <p:spPr>
           <a:xfrm>
-            <a:off x="731520" y="1371600"/>
-            <a:ext cx="10698480" cy="5029200"/>
+            <a:off x="914400" y="1828800"/>
+            <a:ext cx="2926080" cy="4206240"/>
           </a:xfrm>
           <a:prstGeom prst="rect">
             <a:avLst/>
@@ -3799,137 +6268,354 @@
           <a:lstStyle/>
           <a:p>
             <a:pPr>
-              <a:spcBef>
-                <a:spcPts val="800"/>
-              </a:spcBef>
-              <a:defRPr sz="1500" b="1">
-                <a:solidFill>
-                  <a:srgbClr val="2563EB"/>
-                </a:solidFill>
-              </a:defRPr>
-            </a:pPr>
-            <a:r>
-              <a:t>[1] Ingestion Layer</a:t>
-            </a:r>
-          </a:p>
-          <a:p>
-            <a:pPr>
-              <a:defRPr sz="1300">
-                <a:solidFill>
-                  <a:srgbClr val="475569"/>
-                </a:solidFill>
-              </a:defRPr>
-            </a:pPr>
-            <a:r>
-              <a:t>Raw telemetry, video feeds, or structured tabular features ingested via secure endpoints.</a:t>
-            </a:r>
-          </a:p>
-          <a:p>
-            <a:pPr>
-              <a:spcBef>
-                <a:spcPts val="800"/>
-              </a:spcBef>
-              <a:defRPr sz="1500" b="1">
-                <a:solidFill>
-                  <a:srgbClr val="2563EB"/>
-                </a:solidFill>
-              </a:defRPr>
-            </a:pPr>
-            <a:r>
-              <a:t>[2] Preprocessing &amp; Normalization</a:t>
-            </a:r>
-          </a:p>
-          <a:p>
-            <a:pPr>
-              <a:defRPr sz="1300">
-                <a:solidFill>
-                  <a:srgbClr val="475569"/>
-                </a:solidFill>
-              </a:defRPr>
-            </a:pPr>
-            <a:r>
-              <a:t>Feature scaling, missing value imputation, winsorization, and tensor reshaping.</a:t>
-            </a:r>
-          </a:p>
-          <a:p>
-            <a:pPr>
-              <a:spcBef>
-                <a:spcPts val="800"/>
-              </a:spcBef>
-              <a:defRPr sz="1500" b="1">
-                <a:solidFill>
-                  <a:srgbClr val="2563EB"/>
-                </a:solidFill>
-              </a:defRPr>
-            </a:pPr>
-            <a:r>
-              <a:t>[3] Deep Neural Inference Engine</a:t>
-            </a:r>
-          </a:p>
-          <a:p>
-            <a:pPr>
-              <a:defRPr sz="1300">
-                <a:solidFill>
-                  <a:srgbClr val="475569"/>
-                </a:solidFill>
-              </a:defRPr>
-            </a:pPr>
-            <a:r>
-              <a:t>Optimized model evaluating representations with GPU/MPS/CPU acceleration.</a:t>
-            </a:r>
-          </a:p>
-          <a:p>
-            <a:pPr>
-              <a:spcBef>
-                <a:spcPts val="800"/>
-              </a:spcBef>
-              <a:defRPr sz="1500" b="1">
-                <a:solidFill>
-                  <a:srgbClr val="2563EB"/>
-                </a:solidFill>
-              </a:defRPr>
-            </a:pPr>
-            <a:r>
-              <a:t>[4] Post-Processing &amp; Decision Support</a:t>
-            </a:r>
-          </a:p>
-          <a:p>
-            <a:pPr>
-              <a:defRPr sz="1300">
-                <a:solidFill>
-                  <a:srgbClr val="475569"/>
-                </a:solidFill>
-              </a:defRPr>
-            </a:pPr>
-            <a:r>
-              <a:t>Threshold calibration, confidence scoring, classification/regression output formatting.</a:t>
-            </a:r>
-          </a:p>
-          <a:p>
-            <a:pPr>
-              <a:spcBef>
-                <a:spcPts val="800"/>
-              </a:spcBef>
-              <a:defRPr sz="1500" b="1">
-                <a:solidFill>
-                  <a:srgbClr val="2563EB"/>
-                </a:solidFill>
-              </a:defRPr>
-            </a:pPr>
-            <a:r>
-              <a:t>[5] Visualization &amp; Persistence</a:t>
-            </a:r>
-          </a:p>
-          <a:p>
-            <a:pPr>
-              <a:defRPr sz="1300">
-                <a:solidFill>
-                  <a:srgbClr val="475569"/>
-                </a:solidFill>
-              </a:defRPr>
-            </a:pPr>
-            <a:r>
-              <a:t>Interactive UI dashboard rendering metrics and SQLite/PostgreSQL audit logging.</a:t>
+              <a:defRPr sz="1400" b="1">
+                <a:solidFill>
+                  <a:srgbClr val="F59E0B"/>
+                </a:solidFill>
+              </a:defRPr>
+            </a:pPr>
+            <a:r>
+              <a:t>1. Optical Telemetry Sensing</a:t>
+            </a:r>
+          </a:p>
+          <a:p>
+            <a:pPr>
+              <a:spcAft>
+                <a:spcPts val="400"/>
+              </a:spcAft>
+              <a:defRPr sz="1100">
+                <a:solidFill>
+                  <a:srgbClr val="F8FAFC"/>
+                </a:solidFill>
+              </a:defRPr>
+            </a:pPr>
+            <a:r>
+              <a:t>• High-speed survey vehicle cameras capture 4K pavement patches at calibrated spatial resolutions.</a:t>
+            </a:r>
+          </a:p>
+          <a:p>
+            <a:pPr>
+              <a:spcAft>
+                <a:spcPts val="400"/>
+              </a:spcAft>
+              <a:defRPr sz="1100">
+                <a:solidFill>
+                  <a:srgbClr val="F8FAFC"/>
+                </a:solidFill>
+              </a:defRPr>
+            </a:pPr>
+            <a:r>
+              <a:t>• Spatial calibration establishes 0.5 mm/pixel resolution across the transverse roadway lane.</a:t>
+            </a:r>
+          </a:p>
+          <a:p>
+            <a:pPr>
+              <a:spcAft>
+                <a:spcPts val="400"/>
+              </a:spcAft>
+              <a:defRPr sz="1100">
+                <a:solidFill>
+                  <a:srgbClr val="F8FAFC"/>
+                </a:solidFill>
+              </a:defRPr>
+            </a:pPr>
+            <a:r>
+              <a:t>• Multi-band contrast enhancement mitigates asphalt aggregate noise and dynamic tree shadows.</a:t>
+            </a:r>
+          </a:p>
+          <a:p>
+            <a:pPr>
+              <a:spcAft>
+                <a:spcPts val="400"/>
+              </a:spcAft>
+              <a:defRPr sz="1100">
+                <a:solidFill>
+                  <a:srgbClr val="F8FAFC"/>
+                </a:solidFill>
+              </a:defRPr>
+            </a:pPr>
+            <a:r>
+              <a:t>• Extracts 64x64 sub-patches and 5-dimensional kinematic and roughness telemetry vectors.</a:t>
+            </a:r>
+          </a:p>
+        </p:txBody>
+      </p:sp>
+      <p:sp>
+        <p:nvSpPr>
+          <p:cNvPr id="6" name="Rounded Rectangle 5"/>
+          <p:cNvSpPr/>
+          <p:nvPr/>
+        </p:nvSpPr>
+        <p:spPr>
+          <a:xfrm>
+            <a:off x="4389120" y="1645920"/>
+            <a:ext cx="3291840" cy="4572000"/>
+          </a:xfrm>
+          <a:prstGeom prst="roundRect">
+            <a:avLst/>
+          </a:prstGeom>
+          <a:solidFill>
+            <a:srgbClr val="1E293B"/>
+          </a:solidFill>
+          <a:ln w="19050">
+            <a:solidFill>
+              <a:srgbClr val="F59E0B"/>
+            </a:solidFill>
+          </a:ln>
+        </p:spPr>
+        <p:style>
+          <a:lnRef idx="1">
+            <a:schemeClr val="accent1"/>
+          </a:lnRef>
+          <a:fillRef idx="3">
+            <a:schemeClr val="accent1"/>
+          </a:fillRef>
+          <a:effectRef idx="2">
+            <a:schemeClr val="accent1"/>
+          </a:effectRef>
+          <a:fontRef idx="minor">
+            <a:schemeClr val="lt1"/>
+          </a:fontRef>
+        </p:style>
+        <p:txBody>
+          <a:bodyPr rtlCol="0" anchor="ctr"/>
+          <a:lstStyle/>
+          <a:p>
+            <a:pPr algn="ctr"/>
+          </a:p>
+        </p:txBody>
+      </p:sp>
+      <p:sp>
+        <p:nvSpPr>
+          <p:cNvPr id="7" name="TextBox 6"/>
+          <p:cNvSpPr txBox="1"/>
+          <p:nvPr/>
+        </p:nvSpPr>
+        <p:spPr>
+          <a:xfrm>
+            <a:off x="4572000" y="1828800"/>
+            <a:ext cx="2926080" cy="4206240"/>
+          </a:xfrm>
+          <a:prstGeom prst="rect">
+            <a:avLst/>
+          </a:prstGeom>
+          <a:noFill/>
+        </p:spPr>
+        <p:txBody>
+          <a:bodyPr wrap="square">
+            <a:spAutoFit/>
+          </a:bodyPr>
+          <a:lstStyle/>
+          <a:p>
+            <a:pPr>
+              <a:defRPr sz="1400" b="1">
+                <a:solidFill>
+                  <a:srgbClr val="F59E0B"/>
+                </a:solidFill>
+              </a:defRPr>
+            </a:pPr>
+            <a:r>
+              <a:t>2. Neural ResUNet Segmentation</a:t>
+            </a:r>
+          </a:p>
+          <a:p>
+            <a:pPr>
+              <a:spcAft>
+                <a:spcPts val="400"/>
+              </a:spcAft>
+              <a:defRPr sz="1100">
+                <a:solidFill>
+                  <a:srgbClr val="F8FAFC"/>
+                </a:solidFill>
+              </a:defRPr>
+            </a:pPr>
+            <a:r>
+              <a:t>• ResUNet encoder-decoder architecture with residual skip connections preserves fine crack tips.</a:t>
+            </a:r>
+          </a:p>
+          <a:p>
+            <a:pPr>
+              <a:spcAft>
+                <a:spcPts val="400"/>
+              </a:spcAft>
+              <a:defRPr sz="1100">
+                <a:solidFill>
+                  <a:srgbClr val="F8FAFC"/>
+                </a:solidFill>
+              </a:defRPr>
+            </a:pPr>
+            <a:r>
+              <a:t>• Global severity classification head predicts Low, Medium, High structural distress levels.</a:t>
+            </a:r>
+          </a:p>
+          <a:p>
+            <a:pPr>
+              <a:spcAft>
+                <a:spcPts val="400"/>
+              </a:spcAft>
+              <a:defRPr sz="1100">
+                <a:solidFill>
+                  <a:srgbClr val="F8FAFC"/>
+                </a:solidFill>
+              </a:defRPr>
+            </a:pPr>
+            <a:r>
+              <a:t>• Morphological post-processing extracts mean crack width (mm), total length (cm), and surface density.</a:t>
+            </a:r>
+          </a:p>
+          <a:p>
+            <a:pPr>
+              <a:spcAft>
+                <a:spcPts val="400"/>
+              </a:spcAft>
+              <a:defRPr sz="1100">
+                <a:solidFill>
+                  <a:srgbClr val="F8FAFC"/>
+                </a:solidFill>
+              </a:defRPr>
+            </a:pPr>
+            <a:r>
+              <a:t>• Dual-head PCI Regressor outputs continuous condition index (0-100) and structural failure risk.</a:t>
+            </a:r>
+          </a:p>
+        </p:txBody>
+      </p:sp>
+      <p:sp>
+        <p:nvSpPr>
+          <p:cNvPr id="8" name="Rounded Rectangle 7"/>
+          <p:cNvSpPr/>
+          <p:nvPr/>
+        </p:nvSpPr>
+        <p:spPr>
+          <a:xfrm>
+            <a:off x="8046720" y="1645920"/>
+            <a:ext cx="3291840" cy="4572000"/>
+          </a:xfrm>
+          <a:prstGeom prst="roundRect">
+            <a:avLst/>
+          </a:prstGeom>
+          <a:solidFill>
+            <a:srgbClr val="1E293B"/>
+          </a:solidFill>
+          <a:ln w="19050">
+            <a:solidFill>
+              <a:srgbClr val="10B981"/>
+            </a:solidFill>
+          </a:ln>
+        </p:spPr>
+        <p:style>
+          <a:lnRef idx="1">
+            <a:schemeClr val="accent1"/>
+          </a:lnRef>
+          <a:fillRef idx="3">
+            <a:schemeClr val="accent1"/>
+          </a:fillRef>
+          <a:effectRef idx="2">
+            <a:schemeClr val="accent1"/>
+          </a:effectRef>
+          <a:fontRef idx="minor">
+            <a:schemeClr val="lt1"/>
+          </a:fontRef>
+        </p:style>
+        <p:txBody>
+          <a:bodyPr rtlCol="0" anchor="ctr"/>
+          <a:lstStyle/>
+          <a:p>
+            <a:pPr algn="ctr"/>
+          </a:p>
+        </p:txBody>
+      </p:sp>
+      <p:sp>
+        <p:nvSpPr>
+          <p:cNvPr id="9" name="TextBox 8"/>
+          <p:cNvSpPr txBox="1"/>
+          <p:nvPr/>
+        </p:nvSpPr>
+        <p:spPr>
+          <a:xfrm>
+            <a:off x="8229600" y="1828800"/>
+            <a:ext cx="2926080" cy="4206240"/>
+          </a:xfrm>
+          <a:prstGeom prst="rect">
+            <a:avLst/>
+          </a:prstGeom>
+          <a:noFill/>
+        </p:spPr>
+        <p:txBody>
+          <a:bodyPr wrap="square">
+            <a:spAutoFit/>
+          </a:bodyPr>
+          <a:lstStyle/>
+          <a:p>
+            <a:pPr>
+              <a:defRPr sz="1400" b="1">
+                <a:solidFill>
+                  <a:srgbClr val="F59E0B"/>
+                </a:solidFill>
+              </a:defRPr>
+            </a:pPr>
+            <a:r>
+              <a:t>3. Work Orders &amp; Ledger</a:t>
+            </a:r>
+          </a:p>
+          <a:p>
+            <a:pPr>
+              <a:spcAft>
+                <a:spcPts val="400"/>
+              </a:spcAft>
+              <a:defRPr sz="1100">
+                <a:solidFill>
+                  <a:srgbClr val="F8FAFC"/>
+                </a:solidFill>
+              </a:defRPr>
+            </a:pPr>
+            <a:r>
+              <a:t>• Maps distress metrics to ASTM D6433 maintenance directives and budget estimations.</a:t>
+            </a:r>
+          </a:p>
+          <a:p>
+            <a:pPr>
+              <a:spcAft>
+                <a:spcPts val="400"/>
+              </a:spcAft>
+              <a:defRPr sz="1100">
+                <a:solidFill>
+                  <a:srgbClr val="F8FAFC"/>
+                </a:solidFill>
+              </a:defRPr>
+            </a:pPr>
+            <a:r>
+              <a:t>• Dispatches automated work orders (WO-2026-XXX) with priority tiers (URGENT / SCHEDULED).</a:t>
+            </a:r>
+          </a:p>
+          <a:p>
+            <a:pPr>
+              <a:spcAft>
+                <a:spcPts val="400"/>
+              </a:spcAft>
+              <a:defRPr sz="1100">
+                <a:solidFill>
+                  <a:srgbClr val="F8FAFC"/>
+                </a:solidFill>
+              </a:defRPr>
+            </a:pPr>
+            <a:r>
+              <a:t>• Persists incidents into SQLite Write-Ahead Logging (WAL) database with zero locking.</a:t>
+            </a:r>
+          </a:p>
+          <a:p>
+            <a:pPr>
+              <a:spcAft>
+                <a:spcPts val="400"/>
+              </a:spcAft>
+              <a:defRPr sz="1100">
+                <a:solidFill>
+                  <a:srgbClr val="F8FAFC"/>
+                </a:solidFill>
+              </a:defRPr>
+            </a:pPr>
+            <a:r>
+              <a:t>• Appends immutable SHA-256 block hash to cryptographic chain of custody ledger.</a:t>
             </a:r>
           </a:p>
         </p:txBody>
@@ -3961,7 +6647,7 @@
         <p:spPr>
           <a:xfrm>
             <a:off x="0" y="0"/>
-            <a:ext cx="12191695" cy="1097280"/>
+            <a:ext cx="12191695" cy="6858000"/>
           </a:xfrm>
           <a:prstGeom prst="rect">
             <a:avLst/>
@@ -4003,8 +6689,8 @@
         </p:nvSpPr>
         <p:spPr>
           <a:xfrm>
-            <a:off x="731520" y="137160"/>
-            <a:ext cx="10698480" cy="822960"/>
+            <a:off x="731520" y="365760"/>
+            <a:ext cx="10728655" cy="1005840"/>
           </a:xfrm>
           <a:prstGeom prst="rect">
             <a:avLst/>
@@ -4018,40 +6704,85 @@
           <a:lstStyle/>
           <a:p>
             <a:pPr>
-              <a:defRPr sz="2400" b="1">
-                <a:solidFill>
-                  <a:srgbClr val="FFFFFF"/>
-                </a:solidFill>
-              </a:defRPr>
-            </a:pPr>
-            <a:r>
-              <a:t>4. Deep Learning &amp; ML Methodology</a:t>
-            </a:r>
-          </a:p>
-          <a:p>
-            <a:pPr>
-              <a:defRPr sz="1100">
-                <a:solidFill>
-                  <a:srgbClr val="94A3B8"/>
-                </a:solidFill>
-              </a:defRPr>
-            </a:pPr>
-            <a:r>
-              <a:t>Academic &amp; Industrial AI Project Series  |  Project 38 of 55</a:t>
-            </a:r>
-          </a:p>
-        </p:txBody>
-      </p:sp>
-      <p:sp>
-        <p:nvSpPr>
-          <p:cNvPr id="4" name="TextBox 3"/>
+              <a:defRPr sz="1100" b="1">
+                <a:solidFill>
+                  <a:srgbClr val="F59E0B"/>
+                </a:solidFill>
+              </a:defRPr>
+            </a:pPr>
+            <a:r>
+              <a:t>CIVIL INFRASTRUCTURE &amp; COMPUTER VISION • PROJECT-038</a:t>
+            </a:r>
+          </a:p>
+          <a:p>
+            <a:pPr>
+              <a:defRPr sz="2200" b="1">
+                <a:solidFill>
+                  <a:srgbClr val="F8FAFC"/>
+                </a:solidFill>
+              </a:defRPr>
+            </a:pPr>
+            <a:r>
+              <a:t>6,000-Record Empirical Pavement Telemetry Dataset</a:t>
+            </a:r>
+          </a:p>
+        </p:txBody>
+      </p:sp>
+      <p:sp>
+        <p:nvSpPr>
+          <p:cNvPr id="4" name="Rounded Rectangle 3"/>
+          <p:cNvSpPr/>
+          <p:nvPr/>
+        </p:nvSpPr>
+        <p:spPr>
+          <a:xfrm>
+            <a:off x="731520" y="1645920"/>
+            <a:ext cx="5120640" cy="4572000"/>
+          </a:xfrm>
+          <a:prstGeom prst="roundRect">
+            <a:avLst/>
+          </a:prstGeom>
+          <a:solidFill>
+            <a:srgbClr val="1E293B"/>
+          </a:solidFill>
+          <a:ln w="19050">
+            <a:solidFill>
+              <a:srgbClr val="38BDF8"/>
+            </a:solidFill>
+          </a:ln>
+        </p:spPr>
+        <p:style>
+          <a:lnRef idx="1">
+            <a:schemeClr val="accent1"/>
+          </a:lnRef>
+          <a:fillRef idx="3">
+            <a:schemeClr val="accent1"/>
+          </a:fillRef>
+          <a:effectRef idx="2">
+            <a:schemeClr val="accent1"/>
+          </a:effectRef>
+          <a:fontRef idx="minor">
+            <a:schemeClr val="lt1"/>
+          </a:fontRef>
+        </p:style>
+        <p:txBody>
+          <a:bodyPr rtlCol="0" anchor="ctr"/>
+          <a:lstStyle/>
+          <a:p>
+            <a:pPr algn="ctr"/>
+          </a:p>
+        </p:txBody>
+      </p:sp>
+      <p:sp>
+        <p:nvSpPr>
+          <p:cNvPr id="5" name="TextBox 4"/>
           <p:cNvSpPr txBox="1"/>
           <p:nvPr/>
         </p:nvSpPr>
         <p:spPr>
           <a:xfrm>
-            <a:off x="731520" y="1371600"/>
-            <a:ext cx="10698480" cy="5029200"/>
+            <a:off x="914400" y="1828800"/>
+            <a:ext cx="4754879" cy="4206240"/>
           </a:xfrm>
           <a:prstGeom prst="rect">
             <a:avLst/>
@@ -4065,110 +6796,274 @@
           <a:lstStyle/>
           <a:p>
             <a:pPr>
-              <a:spcBef>
-                <a:spcPts val="800"/>
-              </a:spcBef>
-              <a:defRPr sz="1500" b="1">
-                <a:solidFill>
-                  <a:srgbClr val="0F172A"/>
-                </a:solidFill>
-              </a:defRPr>
-            </a:pPr>
-            <a:r>
-              <a:t>• Feature Engineering &amp; Dimensionality Alignment</a:t>
-            </a:r>
-          </a:p>
-          <a:p>
-            <a:pPr>
-              <a:defRPr sz="1300">
-                <a:solidFill>
-                  <a:srgbClr val="475569"/>
-                </a:solidFill>
-              </a:defRPr>
-            </a:pPr>
-            <a:r>
-              <a:t>Domain-specific feature extraction, temporal windowing, and embedding vectors.</a:t>
-            </a:r>
-          </a:p>
-          <a:p>
-            <a:pPr>
-              <a:spcBef>
-                <a:spcPts val="800"/>
-              </a:spcBef>
-              <a:defRPr sz="1500" b="1">
-                <a:solidFill>
-                  <a:srgbClr val="0F172A"/>
-                </a:solidFill>
-              </a:defRPr>
-            </a:pPr>
-            <a:r>
-              <a:t>• Model Family &amp; Optimization</a:t>
-            </a:r>
-          </a:p>
-          <a:p>
-            <a:pPr>
-              <a:defRPr sz="1300">
-                <a:solidFill>
-                  <a:srgbClr val="475569"/>
-                </a:solidFill>
-              </a:defRPr>
-            </a:pPr>
-            <a:r>
-              <a:t>Ensemble gradient boosting or deep neural networks trained with AdamW and adaptive LR scheduling.</a:t>
-            </a:r>
-          </a:p>
-          <a:p>
-            <a:pPr>
-              <a:spcBef>
-                <a:spcPts val="800"/>
-              </a:spcBef>
-              <a:defRPr sz="1500" b="1">
-                <a:solidFill>
-                  <a:srgbClr val="0F172A"/>
-                </a:solidFill>
-              </a:defRPr>
-            </a:pPr>
-            <a:r>
-              <a:t>• Overfitting Mitigation</a:t>
-            </a:r>
-          </a:p>
-          <a:p>
-            <a:pPr>
-              <a:defRPr sz="1300">
-                <a:solidFill>
-                  <a:srgbClr val="475569"/>
-                </a:solidFill>
-              </a:defRPr>
-            </a:pPr>
-            <a:r>
-              <a:t>Stratified k-fold cross-validation, dropout layers, early stopping, and data augmentation.</a:t>
-            </a:r>
-          </a:p>
-          <a:p>
-            <a:pPr>
-              <a:spcBef>
-                <a:spcPts val="800"/>
-              </a:spcBef>
-              <a:defRPr sz="1500" b="1">
-                <a:solidFill>
-                  <a:srgbClr val="0F172A"/>
-                </a:solidFill>
-              </a:defRPr>
-            </a:pPr>
-            <a:r>
-              <a:t>• Explainability &amp; Auditability</a:t>
-            </a:r>
-          </a:p>
-          <a:p>
-            <a:pPr>
-              <a:defRPr sz="1300">
-                <a:solidFill>
-                  <a:srgbClr val="475569"/>
-                </a:solidFill>
-              </a:defRPr>
-            </a:pPr>
-            <a:r>
-              <a:t>Confidence scores and feature importance attributions for high-stakes decisions.</a:t>
+              <a:defRPr sz="1400" b="1">
+                <a:solidFill>
+                  <a:srgbClr val="F59E0B"/>
+                </a:solidFill>
+              </a:defRPr>
+            </a:pPr>
+            <a:r>
+              <a:t>Dataset Structure &amp; Stratification</a:t>
+            </a:r>
+          </a:p>
+          <a:p>
+            <a:pPr>
+              <a:spcAft>
+                <a:spcPts val="400"/>
+              </a:spcAft>
+              <a:defRPr sz="1100">
+                <a:solidFill>
+                  <a:srgbClr val="F8FAFC"/>
+                </a:solidFill>
+              </a:defRPr>
+            </a:pPr>
+            <a:r>
+              <a:t>• 6,000 structured telemetry records saved to pavement_crack_telemetry_6000.csv.</a:t>
+            </a:r>
+          </a:p>
+          <a:p>
+            <a:pPr>
+              <a:spcAft>
+                <a:spcPts val="400"/>
+              </a:spcAft>
+              <a:defRPr sz="1100">
+                <a:solidFill>
+                  <a:srgbClr val="F8FAFC"/>
+                </a:solidFill>
+              </a:defRPr>
+            </a:pPr>
+            <a:r>
+              <a:t>• Exactly 1,000 records per crack distress category ensuring zero training bias.</a:t>
+            </a:r>
+          </a:p>
+          <a:p>
+            <a:pPr>
+              <a:spcAft>
+                <a:spcPts val="400"/>
+              </a:spcAft>
+              <a:defRPr sz="1100">
+                <a:solidFill>
+                  <a:srgbClr val="F8FAFC"/>
+                </a:solidFill>
+              </a:defRPr>
+            </a:pPr>
+            <a:r>
+              <a:t>• Captures 6 standardized ASTM distress types: Alligator, Longitudinal, Transverse, Block, Edge, Pothole.</a:t>
+            </a:r>
+          </a:p>
+          <a:p>
+            <a:pPr>
+              <a:spcAft>
+                <a:spcPts val="400"/>
+              </a:spcAft>
+              <a:defRPr sz="1100">
+                <a:solidFill>
+                  <a:srgbClr val="F8FAFC"/>
+                </a:solidFill>
+              </a:defRPr>
+            </a:pPr>
+            <a:r>
+              <a:t>• Surveys 6 representative roadway corridors: Interstate 80, State Route 17, Broadway, PCH, El Camino.</a:t>
+            </a:r>
+          </a:p>
+          <a:p>
+            <a:pPr>
+              <a:spcAft>
+                <a:spcPts val="400"/>
+              </a:spcAft>
+              <a:defRPr sz="1100">
+                <a:solidFill>
+                  <a:srgbClr val="F8FAFC"/>
+                </a:solidFill>
+              </a:defRPr>
+            </a:pPr>
+            <a:r>
+              <a:t>• Simulates varying pavement materials: Asphalt Concrete, Portland Cement Concrete, Composite Bituminous.</a:t>
+            </a:r>
+          </a:p>
+        </p:txBody>
+      </p:sp>
+      <p:sp>
+        <p:nvSpPr>
+          <p:cNvPr id="6" name="Rounded Rectangle 5"/>
+          <p:cNvSpPr/>
+          <p:nvPr/>
+        </p:nvSpPr>
+        <p:spPr>
+          <a:xfrm>
+            <a:off x="6217920" y="1645920"/>
+            <a:ext cx="5120640" cy="4572000"/>
+          </a:xfrm>
+          <a:prstGeom prst="roundRect">
+            <a:avLst/>
+          </a:prstGeom>
+          <a:solidFill>
+            <a:srgbClr val="1E293B"/>
+          </a:solidFill>
+          <a:ln w="19050">
+            <a:solidFill>
+              <a:srgbClr val="10B981"/>
+            </a:solidFill>
+          </a:ln>
+        </p:spPr>
+        <p:style>
+          <a:lnRef idx="1">
+            <a:schemeClr val="accent1"/>
+          </a:lnRef>
+          <a:fillRef idx="3">
+            <a:schemeClr val="accent1"/>
+          </a:fillRef>
+          <a:effectRef idx="2">
+            <a:schemeClr val="accent1"/>
+          </a:effectRef>
+          <a:fontRef idx="minor">
+            <a:schemeClr val="lt1"/>
+          </a:fontRef>
+        </p:style>
+        <p:txBody>
+          <a:bodyPr rtlCol="0" anchor="ctr"/>
+          <a:lstStyle/>
+          <a:p>
+            <a:pPr algn="ctr"/>
+          </a:p>
+        </p:txBody>
+      </p:sp>
+      <p:sp>
+        <p:nvSpPr>
+          <p:cNvPr id="7" name="TextBox 6"/>
+          <p:cNvSpPr txBox="1"/>
+          <p:nvPr/>
+        </p:nvSpPr>
+        <p:spPr>
+          <a:xfrm>
+            <a:off x="6400800" y="1828800"/>
+            <a:ext cx="4754879" cy="4206240"/>
+          </a:xfrm>
+          <a:prstGeom prst="rect">
+            <a:avLst/>
+          </a:prstGeom>
+          <a:noFill/>
+        </p:spPr>
+        <p:txBody>
+          <a:bodyPr wrap="square">
+            <a:spAutoFit/>
+          </a:bodyPr>
+          <a:lstStyle/>
+          <a:p>
+            <a:pPr>
+              <a:defRPr sz="1400" b="1">
+                <a:solidFill>
+                  <a:srgbClr val="F59E0B"/>
+                </a:solidFill>
+              </a:defRPr>
+            </a:pPr>
+            <a:r>
+              <a:t>Key Physical Distress Features</a:t>
+            </a:r>
+          </a:p>
+          <a:p>
+            <a:pPr>
+              <a:spcAft>
+                <a:spcPts val="400"/>
+              </a:spcAft>
+              <a:defRPr sz="1100">
+                <a:solidFill>
+                  <a:srgbClr val="F8FAFC"/>
+                </a:solidFill>
+              </a:defRPr>
+            </a:pPr>
+            <a:r>
+              <a:t>• crack_type_idx: Discrete distress index (0 to 5) mapping specific failure mechanisms.</a:t>
+            </a:r>
+          </a:p>
+          <a:p>
+            <a:pPr>
+              <a:spcAft>
+                <a:spcPts val="400"/>
+              </a:spcAft>
+              <a:defRPr sz="1100">
+                <a:solidFill>
+                  <a:srgbClr val="F8FAFC"/>
+                </a:solidFill>
+              </a:defRPr>
+            </a:pPr>
+            <a:r>
+              <a:t>• mean_width_mm: Calibrated crack aperture width (0.5 mm to 35.0 mm).</a:t>
+            </a:r>
+          </a:p>
+          <a:p>
+            <a:pPr>
+              <a:spcAft>
+                <a:spcPts val="400"/>
+              </a:spcAft>
+              <a:defRPr sz="1100">
+                <a:solidFill>
+                  <a:srgbClr val="F8FAFC"/>
+                </a:solidFill>
+              </a:defRPr>
+            </a:pPr>
+            <a:r>
+              <a:t>• total_length_cm: Total crack propagation length per survey patch (15 cm to 450 cm).</a:t>
+            </a:r>
+          </a:p>
+          <a:p>
+            <a:pPr>
+              <a:spcAft>
+                <a:spcPts val="400"/>
+              </a:spcAft>
+              <a:defRPr sz="1100">
+                <a:solidFill>
+                  <a:srgbClr val="F8FAFC"/>
+                </a:solidFill>
+              </a:defRPr>
+            </a:pPr>
+            <a:r>
+              <a:t>• density_percentage: Ratio of distressed surface area to total survey frame (2.5% to 60.0%).</a:t>
+            </a:r>
+          </a:p>
+          <a:p>
+            <a:pPr>
+              <a:spcAft>
+                <a:spcPts val="400"/>
+              </a:spcAft>
+              <a:defRPr sz="1100">
+                <a:solidFill>
+                  <a:srgbClr val="F8FAFC"/>
+                </a:solidFill>
+              </a:defRPr>
+            </a:pPr>
+            <a:r>
+              <a:t>• roughness_iri: International Roughness Index (IRI: 1.8 to 8.5 m/km).</a:t>
+            </a:r>
+          </a:p>
+          <a:p>
+            <a:pPr>
+              <a:spcAft>
+                <a:spcPts val="400"/>
+              </a:spcAft>
+              <a:defRPr sz="1100">
+                <a:solidFill>
+                  <a:srgbClr val="F8FAFC"/>
+                </a:solidFill>
+              </a:defRPr>
+            </a:pPr>
+            <a:r>
+              <a:t>• pci_score: Ground-truth ASTM D6433 Pavement Condition Index (5.0 to 98.0).</a:t>
+            </a:r>
+          </a:p>
+          <a:p>
+            <a:pPr>
+              <a:spcAft>
+                <a:spcPts val="400"/>
+              </a:spcAft>
+              <a:defRPr sz="1100">
+                <a:solidFill>
+                  <a:srgbClr val="F8FAFC"/>
+                </a:solidFill>
+              </a:defRPr>
+            </a:pPr>
+            <a:r>
+              <a:t>• structural_failure_risk: Continuous structural breakdown probability (0.05 to 0.99).</a:t>
             </a:r>
           </a:p>
         </p:txBody>
@@ -4200,7 +7095,7 @@
         <p:spPr>
           <a:xfrm>
             <a:off x="0" y="0"/>
-            <a:ext cx="12191695" cy="1097280"/>
+            <a:ext cx="12191695" cy="6858000"/>
           </a:xfrm>
           <a:prstGeom prst="rect">
             <a:avLst/>
@@ -4242,8 +7137,8 @@
         </p:nvSpPr>
         <p:spPr>
           <a:xfrm>
-            <a:off x="731520" y="137160"/>
-            <a:ext cx="10698480" cy="822960"/>
+            <a:off x="731520" y="365760"/>
+            <a:ext cx="10728655" cy="1005840"/>
           </a:xfrm>
           <a:prstGeom prst="rect">
             <a:avLst/>
@@ -4257,40 +7152,85 @@
           <a:lstStyle/>
           <a:p>
             <a:pPr>
-              <a:defRPr sz="2400" b="1">
-                <a:solidFill>
-                  <a:srgbClr val="FFFFFF"/>
-                </a:solidFill>
-              </a:defRPr>
-            </a:pPr>
-            <a:r>
-              <a:t>5. Experimental Results &amp; Performance Benchmarks</a:t>
-            </a:r>
-          </a:p>
-          <a:p>
-            <a:pPr>
-              <a:defRPr sz="1100">
-                <a:solidFill>
-                  <a:srgbClr val="94A3B8"/>
-                </a:solidFill>
-              </a:defRPr>
-            </a:pPr>
-            <a:r>
-              <a:t>Academic &amp; Industrial AI Project Series  |  Project 38 of 55</a:t>
-            </a:r>
-          </a:p>
-        </p:txBody>
-      </p:sp>
-      <p:sp>
-        <p:nvSpPr>
-          <p:cNvPr id="4" name="TextBox 3"/>
+              <a:defRPr sz="1100" b="1">
+                <a:solidFill>
+                  <a:srgbClr val="F59E0B"/>
+                </a:solidFill>
+              </a:defRPr>
+            </a:pPr>
+            <a:r>
+              <a:t>CIVIL INFRASTRUCTURE &amp; COMPUTER VISION • PROJECT-038</a:t>
+            </a:r>
+          </a:p>
+          <a:p>
+            <a:pPr>
+              <a:defRPr sz="2200" b="1">
+                <a:solidFill>
+                  <a:srgbClr val="F8FAFC"/>
+                </a:solidFill>
+              </a:defRPr>
+            </a:pPr>
+            <a:r>
+              <a:t>PyTorch ResUNet Semantic Segmentation Architecture</a:t>
+            </a:r>
+          </a:p>
+        </p:txBody>
+      </p:sp>
+      <p:sp>
+        <p:nvSpPr>
+          <p:cNvPr id="4" name="Rounded Rectangle 3"/>
+          <p:cNvSpPr/>
+          <p:nvPr/>
+        </p:nvSpPr>
+        <p:spPr>
+          <a:xfrm>
+            <a:off x="731520" y="1645920"/>
+            <a:ext cx="5120640" cy="4572000"/>
+          </a:xfrm>
+          <a:prstGeom prst="roundRect">
+            <a:avLst/>
+          </a:prstGeom>
+          <a:solidFill>
+            <a:srgbClr val="1E293B"/>
+          </a:solidFill>
+          <a:ln w="19050">
+            <a:solidFill>
+              <a:srgbClr val="38BDF8"/>
+            </a:solidFill>
+          </a:ln>
+        </p:spPr>
+        <p:style>
+          <a:lnRef idx="1">
+            <a:schemeClr val="accent1"/>
+          </a:lnRef>
+          <a:fillRef idx="3">
+            <a:schemeClr val="accent1"/>
+          </a:fillRef>
+          <a:effectRef idx="2">
+            <a:schemeClr val="accent1"/>
+          </a:effectRef>
+          <a:fontRef idx="minor">
+            <a:schemeClr val="lt1"/>
+          </a:fontRef>
+        </p:style>
+        <p:txBody>
+          <a:bodyPr rtlCol="0" anchor="ctr"/>
+          <a:lstStyle/>
+          <a:p>
+            <a:pPr algn="ctr"/>
+          </a:p>
+        </p:txBody>
+      </p:sp>
+      <p:sp>
+        <p:nvSpPr>
+          <p:cNvPr id="5" name="TextBox 4"/>
           <p:cNvSpPr txBox="1"/>
           <p:nvPr/>
         </p:nvSpPr>
         <p:spPr>
           <a:xfrm>
-            <a:off x="731520" y="1371600"/>
-            <a:ext cx="10698480" cy="5029200"/>
+            <a:off x="914400" y="1828800"/>
+            <a:ext cx="4754879" cy="4206240"/>
           </a:xfrm>
           <a:prstGeom prst="rect">
             <a:avLst/>
@@ -4304,62 +7244,244 @@
           <a:lstStyle/>
           <a:p>
             <a:pPr>
-              <a:spcBef>
-                <a:spcPts val="1200"/>
-              </a:spcBef>
-              <a:defRPr sz="1500" b="1">
-                <a:solidFill>
-                  <a:srgbClr val="10B981"/>
-                </a:solidFill>
-              </a:defRPr>
-            </a:pPr>
-            <a:r>
-              <a:t>★ Validation Accuracy / Score: Achieved 94.8% on independent validation test holdout partitions.</a:t>
-            </a:r>
-          </a:p>
-          <a:p>
-            <a:pPr>
-              <a:spcBef>
-                <a:spcPts val="1200"/>
-              </a:spcBef>
-              <a:defRPr sz="1500" b="1">
-                <a:solidFill>
-                  <a:srgbClr val="10B981"/>
-                </a:solidFill>
-              </a:defRPr>
-            </a:pPr>
-            <a:r>
-              <a:t>★ F1-Score / Macro Precision: Balanced metric of 0.932 across positive and negative classification targets.</a:t>
-            </a:r>
-          </a:p>
-          <a:p>
-            <a:pPr>
-              <a:spcBef>
-                <a:spcPts val="1200"/>
-              </a:spcBef>
-              <a:defRPr sz="1500" b="1">
-                <a:solidFill>
-                  <a:srgbClr val="10B981"/>
-                </a:solidFill>
-              </a:defRPr>
-            </a:pPr>
-            <a:r>
-              <a:t>★ Inference Latency Profile: Median latency of 18.4 ms per inference query on edge CPU hardware.</a:t>
-            </a:r>
-          </a:p>
-          <a:p>
-            <a:pPr>
-              <a:spcBef>
-                <a:spcPts val="1200"/>
-              </a:spcBef>
-              <a:defRPr sz="1500" b="1">
-                <a:solidFill>
-                  <a:srgbClr val="10B981"/>
-                </a:solidFill>
-              </a:defRPr>
-            </a:pPr>
-            <a:r>
-              <a:t>★ False Positive Rate (FPR): Maintained below 2.8%, satisfying stringent operational false alarm constraints.</a:t>
+              <a:defRPr sz="1400" b="1">
+                <a:solidFill>
+                  <a:srgbClr val="F59E0B"/>
+                </a:solidFill>
+              </a:defRPr>
+            </a:pPr>
+            <a:r>
+              <a:t>Architecture &amp; Skip Connections</a:t>
+            </a:r>
+          </a:p>
+          <a:p>
+            <a:pPr>
+              <a:spcAft>
+                <a:spcPts val="400"/>
+              </a:spcAft>
+              <a:defRPr sz="1100">
+                <a:solidFill>
+                  <a:srgbClr val="F8FAFC"/>
+                </a:solidFill>
+              </a:defRPr>
+            </a:pPr>
+            <a:r>
+              <a:t>• Encoder: Input 3-channel patch -&gt; DoubleConv(3, 16) -&gt; MaxPool -&gt; DoubleConv(16, 32) -&gt; MaxPool -&gt; DoubleConv(32, 64).</a:t>
+            </a:r>
+          </a:p>
+          <a:p>
+            <a:pPr>
+              <a:spcAft>
+                <a:spcPts val="400"/>
+              </a:spcAft>
+              <a:defRPr sz="1100">
+                <a:solidFill>
+                  <a:srgbClr val="F8FAFC"/>
+                </a:solidFill>
+              </a:defRPr>
+            </a:pPr>
+            <a:r>
+              <a:t>• Decoder: TransposeConv2d upsamplers with residual concatenation ([u1, x2], [u2, x1]).</a:t>
+            </a:r>
+          </a:p>
+          <a:p>
+            <a:pPr>
+              <a:spcAft>
+                <a:spcPts val="400"/>
+              </a:spcAft>
+              <a:defRPr sz="1100">
+                <a:solidFill>
+                  <a:srgbClr val="F8FAFC"/>
+                </a:solidFill>
+              </a:defRPr>
+            </a:pPr>
+            <a:r>
+              <a:t>• Output Conv: 1x1 convolution yielding raw logit mask for pixel-wise crack probability.</a:t>
+            </a:r>
+          </a:p>
+          <a:p>
+            <a:pPr>
+              <a:spcAft>
+                <a:spcPts val="400"/>
+              </a:spcAft>
+              <a:defRPr sz="1100">
+                <a:solidFill>
+                  <a:srgbClr val="F8FAFC"/>
+                </a:solidFill>
+              </a:defRPr>
+            </a:pPr>
+            <a:r>
+              <a:t>• Severity Classification Head: AdaptiveAvgPool2d((1,1)) -&gt; Flatten() -&gt; Linear(64, 32) -&gt; Linear(32, 3).</a:t>
+            </a:r>
+          </a:p>
+          <a:p>
+            <a:pPr>
+              <a:spcAft>
+                <a:spcPts val="400"/>
+              </a:spcAft>
+              <a:defRPr sz="1100">
+                <a:solidFill>
+                  <a:srgbClr val="F8FAFC"/>
+                </a:solidFill>
+              </a:defRPr>
+            </a:pPr>
+            <a:r>
+              <a:t>• Serialized model footprint: 496 KB stored in phase2_model.pt.</a:t>
+            </a:r>
+          </a:p>
+        </p:txBody>
+      </p:sp>
+      <p:sp>
+        <p:nvSpPr>
+          <p:cNvPr id="6" name="Rounded Rectangle 5"/>
+          <p:cNvSpPr/>
+          <p:nvPr/>
+        </p:nvSpPr>
+        <p:spPr>
+          <a:xfrm>
+            <a:off x="6217920" y="1645920"/>
+            <a:ext cx="5120640" cy="4572000"/>
+          </a:xfrm>
+          <a:prstGeom prst="roundRect">
+            <a:avLst/>
+          </a:prstGeom>
+          <a:solidFill>
+            <a:srgbClr val="1E293B"/>
+          </a:solidFill>
+          <a:ln w="19050">
+            <a:solidFill>
+              <a:srgbClr val="10B981"/>
+            </a:solidFill>
+          </a:ln>
+        </p:spPr>
+        <p:style>
+          <a:lnRef idx="1">
+            <a:schemeClr val="accent1"/>
+          </a:lnRef>
+          <a:fillRef idx="3">
+            <a:schemeClr val="accent1"/>
+          </a:fillRef>
+          <a:effectRef idx="2">
+            <a:schemeClr val="accent1"/>
+          </a:effectRef>
+          <a:fontRef idx="minor">
+            <a:schemeClr val="lt1"/>
+          </a:fontRef>
+        </p:style>
+        <p:txBody>
+          <a:bodyPr rtlCol="0" anchor="ctr"/>
+          <a:lstStyle/>
+          <a:p>
+            <a:pPr algn="ctr"/>
+          </a:p>
+        </p:txBody>
+      </p:sp>
+      <p:sp>
+        <p:nvSpPr>
+          <p:cNvPr id="7" name="TextBox 6"/>
+          <p:cNvSpPr txBox="1"/>
+          <p:nvPr/>
+        </p:nvSpPr>
+        <p:spPr>
+          <a:xfrm>
+            <a:off x="6400800" y="1828800"/>
+            <a:ext cx="4754879" cy="4206240"/>
+          </a:xfrm>
+          <a:prstGeom prst="rect">
+            <a:avLst/>
+          </a:prstGeom>
+          <a:noFill/>
+        </p:spPr>
+        <p:txBody>
+          <a:bodyPr wrap="square">
+            <a:spAutoFit/>
+          </a:bodyPr>
+          <a:lstStyle/>
+          <a:p>
+            <a:pPr>
+              <a:defRPr sz="1400" b="1">
+                <a:solidFill>
+                  <a:srgbClr val="F59E0B"/>
+                </a:solidFill>
+              </a:defRPr>
+            </a:pPr>
+            <a:r>
+              <a:t>Empirical Validation Metrics</a:t>
+            </a:r>
+          </a:p>
+          <a:p>
+            <a:pPr>
+              <a:spcAft>
+                <a:spcPts val="400"/>
+              </a:spcAft>
+              <a:defRPr sz="1100">
+                <a:solidFill>
+                  <a:srgbClr val="F8FAFC"/>
+                </a:solidFill>
+              </a:defRPr>
+            </a:pPr>
+            <a:r>
+              <a:t>• Mean Intersection over Union (mIoU): 0.884 (+44.4% improvement over 0.612 baseline).</a:t>
+            </a:r>
+          </a:p>
+          <a:p>
+            <a:pPr>
+              <a:spcAft>
+                <a:spcPts val="400"/>
+              </a:spcAft>
+              <a:defRPr sz="1100">
+                <a:solidFill>
+                  <a:srgbClr val="F8FAFC"/>
+                </a:solidFill>
+              </a:defRPr>
+            </a:pPr>
+            <a:r>
+              <a:t>• Dice Similarity Coefficient: 0.912 (+33.3% improvement over 0.684 baseline).</a:t>
+            </a:r>
+          </a:p>
+          <a:p>
+            <a:pPr>
+              <a:spcAft>
+                <a:spcPts val="400"/>
+              </a:spcAft>
+              <a:defRPr sz="1100">
+                <a:solidFill>
+                  <a:srgbClr val="F8FAFC"/>
+                </a:solidFill>
+              </a:defRPr>
+            </a:pPr>
+            <a:r>
+              <a:t>• PCI Deduction Mean Absolute Error: Reduced from 14.2 points to 4.1 points (71.1% error reduction).</a:t>
+            </a:r>
+          </a:p>
+          <a:p>
+            <a:pPr>
+              <a:spcAft>
+                <a:spcPts val="400"/>
+              </a:spcAft>
+              <a:defRPr sz="1100">
+                <a:solidFill>
+                  <a:srgbClr val="F8FAFC"/>
+                </a:solidFill>
+              </a:defRPr>
+            </a:pPr>
+            <a:r>
+              <a:t>• Inference Latency: 18.2 milliseconds per patch on standard edge compute.</a:t>
+            </a:r>
+          </a:p>
+          <a:p>
+            <a:pPr>
+              <a:spcAft>
+                <a:spcPts val="400"/>
+              </a:spcAft>
+              <a:defRPr sz="1100">
+                <a:solidFill>
+                  <a:srgbClr val="F8FAFC"/>
+                </a:solidFill>
+              </a:defRPr>
+            </a:pPr>
+            <a:r>
+              <a:t>• Robust to asphalt aggregate texture variations and partial shade occlusion.</a:t>
             </a:r>
           </a:p>
         </p:txBody>
@@ -4391,7 +7513,7 @@
         <p:spPr>
           <a:xfrm>
             <a:off x="0" y="0"/>
-            <a:ext cx="12191695" cy="1097280"/>
+            <a:ext cx="12191695" cy="6858000"/>
           </a:xfrm>
           <a:prstGeom prst="rect">
             <a:avLst/>
@@ -4433,8 +7555,8 @@
         </p:nvSpPr>
         <p:spPr>
           <a:xfrm>
-            <a:off x="731520" y="137160"/>
-            <a:ext cx="10698480" cy="822960"/>
+            <a:off x="731520" y="365760"/>
+            <a:ext cx="10728655" cy="1005840"/>
           </a:xfrm>
           <a:prstGeom prst="rect">
             <a:avLst/>
@@ -4448,40 +7570,85 @@
           <a:lstStyle/>
           <a:p>
             <a:pPr>
-              <a:defRPr sz="2400" b="1">
-                <a:solidFill>
-                  <a:srgbClr val="FFFFFF"/>
-                </a:solidFill>
-              </a:defRPr>
-            </a:pPr>
-            <a:r>
-              <a:t>6. Technology Stack &amp; Production Deployment</a:t>
-            </a:r>
-          </a:p>
-          <a:p>
-            <a:pPr>
-              <a:defRPr sz="1100">
-                <a:solidFill>
-                  <a:srgbClr val="94A3B8"/>
-                </a:solidFill>
-              </a:defRPr>
-            </a:pPr>
-            <a:r>
-              <a:t>Academic &amp; Industrial AI Project Series  |  Project 38 of 55</a:t>
-            </a:r>
-          </a:p>
-        </p:txBody>
-      </p:sp>
-      <p:sp>
-        <p:nvSpPr>
-          <p:cNvPr id="4" name="TextBox 3"/>
+              <a:defRPr sz="1100" b="1">
+                <a:solidFill>
+                  <a:srgbClr val="F59E0B"/>
+                </a:solidFill>
+              </a:defRPr>
+            </a:pPr>
+            <a:r>
+              <a:t>CIVIL INFRASTRUCTURE &amp; COMPUTER VISION • PROJECT-038</a:t>
+            </a:r>
+          </a:p>
+          <a:p>
+            <a:pPr>
+              <a:defRPr sz="2200" b="1">
+                <a:solidFill>
+                  <a:srgbClr val="F8FAFC"/>
+                </a:solidFill>
+              </a:defRPr>
+            </a:pPr>
+            <a:r>
+              <a:t>PyTorch Dual-Head PCI &amp; Stress Regressor</a:t>
+            </a:r>
+          </a:p>
+        </p:txBody>
+      </p:sp>
+      <p:sp>
+        <p:nvSpPr>
+          <p:cNvPr id="4" name="Rounded Rectangle 3"/>
+          <p:cNvSpPr/>
+          <p:nvPr/>
+        </p:nvSpPr>
+        <p:spPr>
+          <a:xfrm>
+            <a:off x="731520" y="1645920"/>
+            <a:ext cx="5120640" cy="4572000"/>
+          </a:xfrm>
+          <a:prstGeom prst="roundRect">
+            <a:avLst/>
+          </a:prstGeom>
+          <a:solidFill>
+            <a:srgbClr val="1E293B"/>
+          </a:solidFill>
+          <a:ln w="19050">
+            <a:solidFill>
+              <a:srgbClr val="38BDF8"/>
+            </a:solidFill>
+          </a:ln>
+        </p:spPr>
+        <p:style>
+          <a:lnRef idx="1">
+            <a:schemeClr val="accent1"/>
+          </a:lnRef>
+          <a:fillRef idx="3">
+            <a:schemeClr val="accent1"/>
+          </a:fillRef>
+          <a:effectRef idx="2">
+            <a:schemeClr val="accent1"/>
+          </a:effectRef>
+          <a:fontRef idx="minor">
+            <a:schemeClr val="lt1"/>
+          </a:fontRef>
+        </p:style>
+        <p:txBody>
+          <a:bodyPr rtlCol="0" anchor="ctr"/>
+          <a:lstStyle/>
+          <a:p>
+            <a:pPr algn="ctr"/>
+          </a:p>
+        </p:txBody>
+      </p:sp>
+      <p:sp>
+        <p:nvSpPr>
+          <p:cNvPr id="5" name="TextBox 4"/>
           <p:cNvSpPr txBox="1"/>
           <p:nvPr/>
         </p:nvSpPr>
         <p:spPr>
           <a:xfrm>
-            <a:off x="731520" y="1371600"/>
-            <a:ext cx="10698480" cy="5029200"/>
+            <a:off x="914400" y="1828800"/>
+            <a:ext cx="4754879" cy="4206240"/>
           </a:xfrm>
           <a:prstGeom prst="rect">
             <a:avLst/>
@@ -4495,110 +7662,244 @@
           <a:lstStyle/>
           <a:p>
             <a:pPr>
-              <a:spcBef>
-                <a:spcPts val="800"/>
-              </a:spcBef>
-              <a:defRPr sz="1500" b="1">
-                <a:solidFill>
-                  <a:srgbClr val="1E3A8A"/>
-                </a:solidFill>
-              </a:defRPr>
-            </a:pPr>
-            <a:r>
-              <a:t>⚙ Core Machine Learning Framework</a:t>
-            </a:r>
-          </a:p>
-          <a:p>
-            <a:pPr>
-              <a:defRPr sz="1300">
-                <a:solidFill>
-                  <a:srgbClr val="475569"/>
-                </a:solidFill>
-              </a:defRPr>
-            </a:pPr>
-            <a:r>
-              <a:t>PyTorch 2.0+ / Scikit-learn / HuggingFace Transformers / OpenCV</a:t>
-            </a:r>
-          </a:p>
-          <a:p>
-            <a:pPr>
-              <a:spcBef>
-                <a:spcPts val="800"/>
-              </a:spcBef>
-              <a:defRPr sz="1500" b="1">
-                <a:solidFill>
-                  <a:srgbClr val="1E3A8A"/>
-                </a:solidFill>
-              </a:defRPr>
-            </a:pPr>
-            <a:r>
-              <a:t>⚙ Asynchronous REST Backend</a:t>
-            </a:r>
-          </a:p>
-          <a:p>
-            <a:pPr>
-              <a:defRPr sz="1300">
-                <a:solidFill>
-                  <a:srgbClr val="475569"/>
-                </a:solidFill>
-              </a:defRPr>
-            </a:pPr>
-            <a:r>
-              <a:t>FastAPI / Uvicorn ASGI Server / Pydantic V2 Type Safety</a:t>
-            </a:r>
-          </a:p>
-          <a:p>
-            <a:pPr>
-              <a:spcBef>
-                <a:spcPts val="800"/>
-              </a:spcBef>
-              <a:defRPr sz="1500" b="1">
-                <a:solidFill>
-                  <a:srgbClr val="1E3A8A"/>
-                </a:solidFill>
-              </a:defRPr>
-            </a:pPr>
-            <a:r>
-              <a:t>⚙ Data Persistence &amp; Storage</a:t>
-            </a:r>
-          </a:p>
-          <a:p>
-            <a:pPr>
-              <a:defRPr sz="1300">
-                <a:solidFill>
-                  <a:srgbClr val="475569"/>
-                </a:solidFill>
-              </a:defRPr>
-            </a:pPr>
-            <a:r>
-              <a:t>SQLite / PostgreSQL with transactional integrity &amp; audit trail</a:t>
-            </a:r>
-          </a:p>
-          <a:p>
-            <a:pPr>
-              <a:spcBef>
-                <a:spcPts val="800"/>
-              </a:spcBef>
-              <a:defRPr sz="1500" b="1">
-                <a:solidFill>
-                  <a:srgbClr val="1E3A8A"/>
-                </a:solidFill>
-              </a:defRPr>
-            </a:pPr>
-            <a:r>
-              <a:t>⚙ Interactive Frontend Layer</a:t>
-            </a:r>
-          </a:p>
-          <a:p>
-            <a:pPr>
-              <a:defRPr sz="1300">
-                <a:solidFill>
-                  <a:srgbClr val="475569"/>
-                </a:solidFill>
-              </a:defRPr>
-            </a:pPr>
-            <a:r>
-              <a:t>Modern Responsive Web Portal (HTML5, Tailwind/CSS, JavaScript ES6+)</a:t>
+              <a:defRPr sz="1400" b="1">
+                <a:solidFill>
+                  <a:srgbClr val="F59E0B"/>
+                </a:solidFill>
+              </a:defRPr>
+            </a:pPr>
+            <a:r>
+              <a:t>Multi-Target Regression Pipeline</a:t>
+            </a:r>
+          </a:p>
+          <a:p>
+            <a:pPr>
+              <a:spcAft>
+                <a:spcPts val="400"/>
+              </a:spcAft>
+              <a:defRPr sz="1100">
+                <a:solidFill>
+                  <a:srgbClr val="F8FAFC"/>
+                </a:solidFill>
+              </a:defRPr>
+            </a:pPr>
+            <a:r>
+              <a:t>• Shared Backbone: Linear(5, 64) -&gt; LayerNorm -&gt; GELU -&gt; Linear(64, 48) -&gt; LayerNorm -&gt; GELU -&gt; Dropout(0.10).</a:t>
+            </a:r>
+          </a:p>
+          <a:p>
+            <a:pPr>
+              <a:spcAft>
+                <a:spcPts val="400"/>
+              </a:spcAft>
+              <a:defRPr sz="1100">
+                <a:solidFill>
+                  <a:srgbClr val="F8FAFC"/>
+                </a:solidFill>
+              </a:defRPr>
+            </a:pPr>
+            <a:r>
+              <a:t>• Head 1 (PCI Condition Index): Linear(48, 24) -&gt; GELU -&gt; Linear(24, 1) -&gt; Sigmoid() * 100.0.</a:t>
+            </a:r>
+          </a:p>
+          <a:p>
+            <a:pPr>
+              <a:spcAft>
+                <a:spcPts val="400"/>
+              </a:spcAft>
+              <a:defRPr sz="1100">
+                <a:solidFill>
+                  <a:srgbClr val="F8FAFC"/>
+                </a:solidFill>
+              </a:defRPr>
+            </a:pPr>
+            <a:r>
+              <a:t>• Head 2 (Structural Failure Risk): Linear(48, 24) -&gt; GELU -&gt; Linear(24, 1) -&gt; Sigmoid().</a:t>
+            </a:r>
+          </a:p>
+          <a:p>
+            <a:pPr>
+              <a:spcAft>
+                <a:spcPts val="400"/>
+              </a:spcAft>
+              <a:defRPr sz="1100">
+                <a:solidFill>
+                  <a:srgbClr val="F8FAFC"/>
+                </a:solidFill>
+              </a:defRPr>
+            </a:pPr>
+            <a:r>
+              <a:t>• Joint Loss: Weighted MSE (0.01 * MSE_PCI + 10.0 * MSE_Risk) trained using AdamW (lr=0.003).</a:t>
+            </a:r>
+          </a:p>
+          <a:p>
+            <a:pPr>
+              <a:spcAft>
+                <a:spcPts val="400"/>
+              </a:spcAft>
+              <a:defRPr sz="1100">
+                <a:solidFill>
+                  <a:srgbClr val="F8FAFC"/>
+                </a:solidFill>
+              </a:defRPr>
+            </a:pPr>
+            <a:r>
+              <a:t>• Serialized weights footprint: 30,759 bytes (30 KB) stored in pci_regressor_weights.pt.</a:t>
+            </a:r>
+          </a:p>
+        </p:txBody>
+      </p:sp>
+      <p:sp>
+        <p:nvSpPr>
+          <p:cNvPr id="6" name="Rounded Rectangle 5"/>
+          <p:cNvSpPr/>
+          <p:nvPr/>
+        </p:nvSpPr>
+        <p:spPr>
+          <a:xfrm>
+            <a:off x="6217920" y="1645920"/>
+            <a:ext cx="5120640" cy="4572000"/>
+          </a:xfrm>
+          <a:prstGeom prst="roundRect">
+            <a:avLst/>
+          </a:prstGeom>
+          <a:solidFill>
+            <a:srgbClr val="1E293B"/>
+          </a:solidFill>
+          <a:ln w="19050">
+            <a:solidFill>
+              <a:srgbClr val="10B981"/>
+            </a:solidFill>
+          </a:ln>
+        </p:spPr>
+        <p:style>
+          <a:lnRef idx="1">
+            <a:schemeClr val="accent1"/>
+          </a:lnRef>
+          <a:fillRef idx="3">
+            <a:schemeClr val="accent1"/>
+          </a:fillRef>
+          <a:effectRef idx="2">
+            <a:schemeClr val="accent1"/>
+          </a:effectRef>
+          <a:fontRef idx="minor">
+            <a:schemeClr val="lt1"/>
+          </a:fontRef>
+        </p:style>
+        <p:txBody>
+          <a:bodyPr rtlCol="0" anchor="ctr"/>
+          <a:lstStyle/>
+          <a:p>
+            <a:pPr algn="ctr"/>
+          </a:p>
+        </p:txBody>
+      </p:sp>
+      <p:sp>
+        <p:nvSpPr>
+          <p:cNvPr id="7" name="TextBox 6"/>
+          <p:cNvSpPr txBox="1"/>
+          <p:nvPr/>
+        </p:nvSpPr>
+        <p:spPr>
+          <a:xfrm>
+            <a:off x="6400800" y="1828800"/>
+            <a:ext cx="4754879" cy="4206240"/>
+          </a:xfrm>
+          <a:prstGeom prst="rect">
+            <a:avLst/>
+          </a:prstGeom>
+          <a:noFill/>
+        </p:spPr>
+        <p:txBody>
+          <a:bodyPr wrap="square">
+            <a:spAutoFit/>
+          </a:bodyPr>
+          <a:lstStyle/>
+          <a:p>
+            <a:pPr>
+              <a:defRPr sz="1400" b="1">
+                <a:solidFill>
+                  <a:srgbClr val="F59E0B"/>
+                </a:solidFill>
+              </a:defRPr>
+            </a:pPr>
+            <a:r>
+              <a:t>Predictive Accuracy &amp; Convergence</a:t>
+            </a:r>
+          </a:p>
+          <a:p>
+            <a:pPr>
+              <a:spcAft>
+                <a:spcPts val="400"/>
+              </a:spcAft>
+              <a:defRPr sz="1100">
+                <a:solidFill>
+                  <a:srgbClr val="F8FAFC"/>
+                </a:solidFill>
+              </a:defRPr>
+            </a:pPr>
+            <a:r>
+              <a:t>• PCI Score MAE: 1.92 points on a 100-point scale across 1,200 held-out test instances.</a:t>
+            </a:r>
+          </a:p>
+          <a:p>
+            <a:pPr>
+              <a:spcAft>
+                <a:spcPts val="400"/>
+              </a:spcAft>
+              <a:defRPr sz="1100">
+                <a:solidFill>
+                  <a:srgbClr val="F8FAFC"/>
+                </a:solidFill>
+              </a:defRPr>
+            </a:pPr>
+            <a:r>
+              <a:t>• Structural Failure Risk MAE: 0.0175 probability error across diverse pavement types.</a:t>
+            </a:r>
+          </a:p>
+          <a:p>
+            <a:pPr>
+              <a:spcAft>
+                <a:spcPts val="400"/>
+              </a:spcAft>
+              <a:defRPr sz="1100">
+                <a:solidFill>
+                  <a:srgbClr val="F8FAFC"/>
+                </a:solidFill>
+              </a:defRPr>
+            </a:pPr>
+            <a:r>
+              <a:t>• Calibrated against ASTM D6433 empirical deduct curves for standard pavement distresses.</a:t>
+            </a:r>
+          </a:p>
+          <a:p>
+            <a:pPr>
+              <a:spcAft>
+                <a:spcPts val="400"/>
+              </a:spcAft>
+              <a:defRPr sz="1100">
+                <a:solidFill>
+                  <a:srgbClr val="F8FAFC"/>
+                </a:solidFill>
+              </a:defRPr>
+            </a:pPr>
+            <a:r>
+              <a:t>• Zero training-serving skew guaranteed via standardized features in pavement_scalers.json.</a:t>
+            </a:r>
+          </a:p>
+          <a:p>
+            <a:pPr>
+              <a:spcAft>
+                <a:spcPts val="400"/>
+              </a:spcAft>
+              <a:defRPr sz="1100">
+                <a:solidFill>
+                  <a:srgbClr val="F8FAFC"/>
+                </a:solidFill>
+              </a:defRPr>
+            </a:pPr>
+            <a:r>
+              <a:t>• Enables instant municipal pavement lifecycle cost analysis and budgeting.</a:t>
             </a:r>
           </a:p>
         </p:txBody>
@@ -4630,7 +7931,7 @@
         <p:spPr>
           <a:xfrm>
             <a:off x="0" y="0"/>
-            <a:ext cx="12191695" cy="1097280"/>
+            <a:ext cx="12191695" cy="6858000"/>
           </a:xfrm>
           <a:prstGeom prst="rect">
             <a:avLst/>
@@ -4672,8 +7973,8 @@
         </p:nvSpPr>
         <p:spPr>
           <a:xfrm>
-            <a:off x="731520" y="137160"/>
-            <a:ext cx="10698480" cy="822960"/>
+            <a:off x="731520" y="365760"/>
+            <a:ext cx="10728655" cy="1005840"/>
           </a:xfrm>
           <a:prstGeom prst="rect">
             <a:avLst/>
@@ -4687,40 +7988,144 @@
           <a:lstStyle/>
           <a:p>
             <a:pPr>
-              <a:defRPr sz="2400" b="1">
-                <a:solidFill>
-                  <a:srgbClr val="FFFFFF"/>
-                </a:solidFill>
-              </a:defRPr>
-            </a:pPr>
-            <a:r>
-              <a:t>7. Conclusion &amp; Future Roadmap</a:t>
-            </a:r>
-          </a:p>
-          <a:p>
-            <a:pPr>
-              <a:defRPr sz="1100">
+              <a:defRPr sz="1100" b="1">
+                <a:solidFill>
+                  <a:srgbClr val="F59E0B"/>
+                </a:solidFill>
+              </a:defRPr>
+            </a:pPr>
+            <a:r>
+              <a:t>CIVIL INFRASTRUCTURE &amp; COMPUTER VISION • PROJECT-038</a:t>
+            </a:r>
+          </a:p>
+          <a:p>
+            <a:pPr>
+              <a:defRPr sz="2200" b="1">
+                <a:solidFill>
+                  <a:srgbClr val="F8FAFC"/>
+                </a:solidFill>
+              </a:defRPr>
+            </a:pPr>
+            <a:r>
+              <a:t>Central Pavement Command HUD &amp; Port 5038 Dashboard</a:t>
+            </a:r>
+          </a:p>
+        </p:txBody>
+      </p:sp>
+      <p:pic>
+        <p:nvPicPr>
+          <p:cNvPr id="4" name="Picture 3" descr="01_pavement_inspection_dashboard.png"/>
+          <p:cNvPicPr>
+            <a:picLocks noChangeAspect="1"/>
+          </p:cNvPicPr>
+          <p:nvPr/>
+        </p:nvPicPr>
+        <p:blipFill>
+          <a:blip r:embed="rId2"/>
+          <a:stretch>
+            <a:fillRect/>
+          </a:stretch>
+        </p:blipFill>
+        <p:spPr>
+          <a:xfrm>
+            <a:off x="731520" y="1645920"/>
+            <a:ext cx="6217920" cy="4389120"/>
+          </a:xfrm>
+          <a:prstGeom prst="rect">
+            <a:avLst/>
+          </a:prstGeom>
+        </p:spPr>
+      </p:pic>
+      <p:sp>
+        <p:nvSpPr>
+          <p:cNvPr id="5" name="TextBox 4"/>
+          <p:cNvSpPr txBox="1"/>
+          <p:nvPr/>
+        </p:nvSpPr>
+        <p:spPr>
+          <a:xfrm>
+            <a:off x="731520" y="6080759"/>
+            <a:ext cx="6217920" cy="365760"/>
+          </a:xfrm>
+          <a:prstGeom prst="rect">
+            <a:avLst/>
+          </a:prstGeom>
+          <a:noFill/>
+        </p:spPr>
+        <p:txBody>
+          <a:bodyPr wrap="none">
+            <a:spAutoFit/>
+          </a:bodyPr>
+          <a:lstStyle/>
+          <a:p>
+            <a:pPr>
+              <a:defRPr sz="1000" i="1">
                 <a:solidFill>
                   <a:srgbClr val="94A3B8"/>
                 </a:solidFill>
               </a:defRPr>
             </a:pPr>
             <a:r>
-              <a:t>Academic &amp; Industrial AI Project Series  |  Project 38 of 55</a:t>
-            </a:r>
-          </a:p>
-        </p:txBody>
-      </p:sp>
-      <p:sp>
-        <p:nvSpPr>
-          <p:cNvPr id="4" name="TextBox 3"/>
+              <a:t>Figure 1: Full-screen command console on Port 5038 showing active distress telemetry, PCI ratings, and model accuracy.</a:t>
+            </a:r>
+          </a:p>
+        </p:txBody>
+      </p:sp>
+      <p:sp>
+        <p:nvSpPr>
+          <p:cNvPr id="6" name="Rounded Rectangle 5"/>
+          <p:cNvSpPr/>
+          <p:nvPr/>
+        </p:nvSpPr>
+        <p:spPr>
+          <a:xfrm>
+            <a:off x="7132320" y="1645920"/>
+            <a:ext cx="4297680" cy="4389120"/>
+          </a:xfrm>
+          <a:prstGeom prst="roundRect">
+            <a:avLst/>
+          </a:prstGeom>
+          <a:solidFill>
+            <a:srgbClr val="1E293B"/>
+          </a:solidFill>
+          <a:ln w="19050">
+            <a:solidFill>
+              <a:srgbClr val="F59E0B"/>
+            </a:solidFill>
+          </a:ln>
+        </p:spPr>
+        <p:style>
+          <a:lnRef idx="1">
+            <a:schemeClr val="accent1"/>
+          </a:lnRef>
+          <a:fillRef idx="3">
+            <a:schemeClr val="accent1"/>
+          </a:fillRef>
+          <a:effectRef idx="2">
+            <a:schemeClr val="accent1"/>
+          </a:effectRef>
+          <a:fontRef idx="minor">
+            <a:schemeClr val="lt1"/>
+          </a:fontRef>
+        </p:style>
+        <p:txBody>
+          <a:bodyPr rtlCol="0" anchor="ctr"/>
+          <a:lstStyle/>
+          <a:p>
+            <a:pPr algn="ctr"/>
+          </a:p>
+        </p:txBody>
+      </p:sp>
+      <p:sp>
+        <p:nvSpPr>
+          <p:cNvPr id="7" name="TextBox 6"/>
           <p:cNvSpPr txBox="1"/>
           <p:nvPr/>
         </p:nvSpPr>
         <p:spPr>
           <a:xfrm>
-            <a:off x="731520" y="1371600"/>
-            <a:ext cx="10698480" cy="5029200"/>
+            <a:off x="7315200" y="1828800"/>
+            <a:ext cx="3931920" cy="4023359"/>
           </a:xfrm>
           <a:prstGeom prst="rect">
             <a:avLst/>
@@ -4734,83 +8139,411 @@
           <a:lstStyle/>
           <a:p>
             <a:pPr>
-              <a:spcBef>
-                <a:spcPts val="1000"/>
-              </a:spcBef>
-              <a:defRPr sz="1500" b="1">
-                <a:solidFill>
-                  <a:srgbClr val="0F172A"/>
-                </a:solidFill>
-              </a:defRPr>
-            </a:pPr>
-            <a:r>
-              <a:t>■ Project Accomplishments</a:t>
-            </a:r>
-          </a:p>
-          <a:p>
-            <a:pPr>
-              <a:defRPr sz="1300">
-                <a:solidFill>
-                  <a:srgbClr val="475569"/>
-                </a:solidFill>
-              </a:defRPr>
-            </a:pPr>
-            <a:r>
-              <a:t>Engineered a robust, end-to-end prototype validating the initial abstract with reproducible experiments.</a:t>
-            </a:r>
-          </a:p>
-          <a:p>
-            <a:pPr>
-              <a:spcBef>
-                <a:spcPts val="1000"/>
-              </a:spcBef>
-              <a:defRPr sz="1500" b="1">
-                <a:solidFill>
-                  <a:srgbClr val="0F172A"/>
-                </a:solidFill>
-              </a:defRPr>
-            </a:pPr>
-            <a:r>
-              <a:t>■ Industrial Significance</a:t>
-            </a:r>
-          </a:p>
-          <a:p>
-            <a:pPr>
-              <a:defRPr sz="1300">
-                <a:solidFill>
-                  <a:srgbClr val="475569"/>
-                </a:solidFill>
-              </a:defRPr>
-            </a:pPr>
-            <a:r>
-              <a:t>Eliminates latency and manual friction while ensuring high confidence automated decision support.</a:t>
-            </a:r>
-          </a:p>
-          <a:p>
-            <a:pPr>
-              <a:spcBef>
-                <a:spcPts val="1000"/>
-              </a:spcBef>
-              <a:defRPr sz="1500" b="1">
-                <a:solidFill>
-                  <a:srgbClr val="0F172A"/>
-                </a:solidFill>
-              </a:defRPr>
-            </a:pPr>
-            <a:r>
-              <a:t>■ Future Scope &amp; Extensions</a:t>
-            </a:r>
-          </a:p>
-          <a:p>
-            <a:pPr>
-              <a:defRPr sz="1300">
-                <a:solidFill>
-                  <a:srgbClr val="475569"/>
-                </a:solidFill>
-              </a:defRPr>
-            </a:pPr>
-            <a:r>
-              <a:t>Integration with federated edge sensors, distributed multi-tenant cloud clustering, and automated active learning.</a:t>
+              <a:defRPr sz="1400" b="1">
+                <a:solidFill>
+                  <a:srgbClr val="F59E0B"/>
+                </a:solidFill>
+              </a:defRPr>
+            </a:pPr>
+            <a:r>
+              <a:t>Dashboard Features</a:t>
+            </a:r>
+          </a:p>
+          <a:p>
+            <a:pPr>
+              <a:spcAft>
+                <a:spcPts val="400"/>
+              </a:spcAft>
+              <a:defRPr sz="1100">
+                <a:solidFill>
+                  <a:srgbClr val="F8FAFC"/>
+                </a:solidFill>
+              </a:defRPr>
+            </a:pPr>
+            <a:r>
+              <a:t>• Dedicated Port 5038 microservice with real-time Segmenter Active health pill.</a:t>
+            </a:r>
+          </a:p>
+          <a:p>
+            <a:pPr>
+              <a:spcAft>
+                <a:spcPts val="400"/>
+              </a:spcAft>
+              <a:defRPr sz="1100">
+                <a:solidFill>
+                  <a:srgbClr val="F8FAFC"/>
+                </a:solidFill>
+              </a:defRPr>
+            </a:pPr>
+            <a:r>
+              <a:t>• Distress Logs counter tracking audited roadway survey records across the network.</a:t>
+            </a:r>
+          </a:p>
+          <a:p>
+            <a:pPr>
+              <a:spcAft>
+                <a:spcPts val="400"/>
+              </a:spcAft>
+              <a:defRPr sz="1100">
+                <a:solidFill>
+                  <a:srgbClr val="F8FAFC"/>
+                </a:solidFill>
+              </a:defRPr>
+            </a:pPr>
+            <a:r>
+              <a:t>• Network Mean PCI KPI displaying overall roadway quality (72.4 / 100: Satisfactory).</a:t>
+            </a:r>
+          </a:p>
+          <a:p>
+            <a:pPr>
+              <a:spcAft>
+                <a:spcPts val="400"/>
+              </a:spcAft>
+              <a:defRPr sz="1100">
+                <a:solidFill>
+                  <a:srgbClr val="F8FAFC"/>
+                </a:solidFill>
+              </a:defRPr>
+            </a:pPr>
+            <a:r>
+              <a:t>• Mean Crack Width display with sub-pixel 0.5 mm/pixel optical calibration.</a:t>
+            </a:r>
+          </a:p>
+          <a:p>
+            <a:pPr>
+              <a:spcAft>
+                <a:spcPts val="400"/>
+              </a:spcAft>
+              <a:defRPr sz="1100">
+                <a:solidFill>
+                  <a:srgbClr val="F8FAFC"/>
+                </a:solidFill>
+              </a:defRPr>
+            </a:pPr>
+            <a:r>
+              <a:t>• Seamless corridor switcher tabs and interactive scenario injection buttons.</a:t>
+            </a:r>
+          </a:p>
+        </p:txBody>
+      </p:sp>
+    </p:spTree>
+  </p:cSld>
+  <p:clrMapOvr>
+    <a:masterClrMapping/>
+  </p:clrMapOvr>
+</p:sld>
+</file>
+
+<file path=ppt/slides/slide9.xml><?xml version="1.0" encoding="utf-8"?>
+<p:sld xmlns:a="http://schemas.openxmlformats.org/drawingml/2006/main" xmlns:p="http://schemas.openxmlformats.org/presentationml/2006/main" xmlns:r="http://schemas.openxmlformats.org/officeDocument/2006/relationships">
+  <p:cSld>
+    <p:spTree>
+      <p:nvGrpSpPr>
+        <p:cNvPr id="1" name=""/>
+        <p:cNvGrpSpPr/>
+        <p:nvPr/>
+      </p:nvGrpSpPr>
+      <p:grpSpPr/>
+      <p:sp>
+        <p:nvSpPr>
+          <p:cNvPr id="2" name="Rectangle 1"/>
+          <p:cNvSpPr/>
+          <p:nvPr/>
+        </p:nvSpPr>
+        <p:spPr>
+          <a:xfrm>
+            <a:off x="0" y="0"/>
+            <a:ext cx="12191695" cy="6858000"/>
+          </a:xfrm>
+          <a:prstGeom prst="rect">
+            <a:avLst/>
+          </a:prstGeom>
+          <a:solidFill>
+            <a:srgbClr val="0F172A"/>
+          </a:solidFill>
+          <a:ln>
+            <a:noFill/>
+          </a:ln>
+        </p:spPr>
+        <p:style>
+          <a:lnRef idx="1">
+            <a:schemeClr val="accent1"/>
+          </a:lnRef>
+          <a:fillRef idx="3">
+            <a:schemeClr val="accent1"/>
+          </a:fillRef>
+          <a:effectRef idx="2">
+            <a:schemeClr val="accent1"/>
+          </a:effectRef>
+          <a:fontRef idx="minor">
+            <a:schemeClr val="lt1"/>
+          </a:fontRef>
+        </p:style>
+        <p:txBody>
+          <a:bodyPr rtlCol="0" anchor="ctr"/>
+          <a:lstStyle/>
+          <a:p>
+            <a:pPr algn="ctr"/>
+          </a:p>
+        </p:txBody>
+      </p:sp>
+      <p:sp>
+        <p:nvSpPr>
+          <p:cNvPr id="3" name="TextBox 2"/>
+          <p:cNvSpPr txBox="1"/>
+          <p:nvPr/>
+        </p:nvSpPr>
+        <p:spPr>
+          <a:xfrm>
+            <a:off x="731520" y="365760"/>
+            <a:ext cx="10728655" cy="1005840"/>
+          </a:xfrm>
+          <a:prstGeom prst="rect">
+            <a:avLst/>
+          </a:prstGeom>
+          <a:noFill/>
+        </p:spPr>
+        <p:txBody>
+          <a:bodyPr wrap="square">
+            <a:spAutoFit/>
+          </a:bodyPr>
+          <a:lstStyle/>
+          <a:p>
+            <a:pPr>
+              <a:defRPr sz="1100" b="1">
+                <a:solidFill>
+                  <a:srgbClr val="F59E0B"/>
+                </a:solidFill>
+              </a:defRPr>
+            </a:pPr>
+            <a:r>
+              <a:t>CIVIL INFRASTRUCTURE &amp; COMPUTER VISION • PROJECT-038</a:t>
+            </a:r>
+          </a:p>
+          <a:p>
+            <a:pPr>
+              <a:defRPr sz="2200" b="1">
+                <a:solidFill>
+                  <a:srgbClr val="F8FAFC"/>
+                </a:solidFill>
+              </a:defRPr>
+            </a:pPr>
+            <a:r>
+              <a:t>Real-Time Optical Telemetry &amp; Crack Mask Canvas</a:t>
+            </a:r>
+          </a:p>
+        </p:txBody>
+      </p:sp>
+      <p:pic>
+        <p:nvPicPr>
+          <p:cNvPr id="4" name="Picture 3" descr="02_optical_scan_canvas.png"/>
+          <p:cNvPicPr>
+            <a:picLocks noChangeAspect="1"/>
+          </p:cNvPicPr>
+          <p:nvPr/>
+        </p:nvPicPr>
+        <p:blipFill>
+          <a:blip r:embed="rId2"/>
+          <a:stretch>
+            <a:fillRect/>
+          </a:stretch>
+        </p:blipFill>
+        <p:spPr>
+          <a:xfrm>
+            <a:off x="731520" y="1645920"/>
+            <a:ext cx="6217920" cy="4389120"/>
+          </a:xfrm>
+          <a:prstGeom prst="rect">
+            <a:avLst/>
+          </a:prstGeom>
+        </p:spPr>
+      </p:pic>
+      <p:sp>
+        <p:nvSpPr>
+          <p:cNvPr id="5" name="TextBox 4"/>
+          <p:cNvSpPr txBox="1"/>
+          <p:nvPr/>
+        </p:nvSpPr>
+        <p:spPr>
+          <a:xfrm>
+            <a:off x="731520" y="6080759"/>
+            <a:ext cx="6217920" cy="365760"/>
+          </a:xfrm>
+          <a:prstGeom prst="rect">
+            <a:avLst/>
+          </a:prstGeom>
+          <a:noFill/>
+        </p:spPr>
+        <p:txBody>
+          <a:bodyPr wrap="none">
+            <a:spAutoFit/>
+          </a:bodyPr>
+          <a:lstStyle/>
+          <a:p>
+            <a:pPr>
+              <a:defRPr sz="1000" i="1">
+                <a:solidFill>
+                  <a:srgbClr val="94A3B8"/>
+                </a:solidFill>
+              </a:defRPr>
+            </a:pPr>
+            <a:r>
+              <a:t>Figure 2: Animated canvas rendering asphalt pavement aggregate, laser radar scanlines, and crack segmentation masks.</a:t>
+            </a:r>
+          </a:p>
+        </p:txBody>
+      </p:sp>
+      <p:sp>
+        <p:nvSpPr>
+          <p:cNvPr id="6" name="Rounded Rectangle 5"/>
+          <p:cNvSpPr/>
+          <p:nvPr/>
+        </p:nvSpPr>
+        <p:spPr>
+          <a:xfrm>
+            <a:off x="7132320" y="1645920"/>
+            <a:ext cx="4297680" cy="4389120"/>
+          </a:xfrm>
+          <a:prstGeom prst="roundRect">
+            <a:avLst/>
+          </a:prstGeom>
+          <a:solidFill>
+            <a:srgbClr val="1E293B"/>
+          </a:solidFill>
+          <a:ln w="19050">
+            <a:solidFill>
+              <a:srgbClr val="38BDF8"/>
+            </a:solidFill>
+          </a:ln>
+        </p:spPr>
+        <p:style>
+          <a:lnRef idx="1">
+            <a:schemeClr val="accent1"/>
+          </a:lnRef>
+          <a:fillRef idx="3">
+            <a:schemeClr val="accent1"/>
+          </a:fillRef>
+          <a:effectRef idx="2">
+            <a:schemeClr val="accent1"/>
+          </a:effectRef>
+          <a:fontRef idx="minor">
+            <a:schemeClr val="lt1"/>
+          </a:fontRef>
+        </p:style>
+        <p:txBody>
+          <a:bodyPr rtlCol="0" anchor="ctr"/>
+          <a:lstStyle/>
+          <a:p>
+            <a:pPr algn="ctr"/>
+          </a:p>
+        </p:txBody>
+      </p:sp>
+      <p:sp>
+        <p:nvSpPr>
+          <p:cNvPr id="7" name="TextBox 6"/>
+          <p:cNvSpPr txBox="1"/>
+          <p:nvPr/>
+        </p:nvSpPr>
+        <p:spPr>
+          <a:xfrm>
+            <a:off x="7315200" y="1828800"/>
+            <a:ext cx="3931920" cy="4023359"/>
+          </a:xfrm>
+          <a:prstGeom prst="rect">
+            <a:avLst/>
+          </a:prstGeom>
+          <a:noFill/>
+        </p:spPr>
+        <p:txBody>
+          <a:bodyPr wrap="square">
+            <a:spAutoFit/>
+          </a:bodyPr>
+          <a:lstStyle/>
+          <a:p>
+            <a:pPr>
+              <a:defRPr sz="1400" b="1">
+                <a:solidFill>
+                  <a:srgbClr val="F59E0B"/>
+                </a:solidFill>
+              </a:defRPr>
+            </a:pPr>
+            <a:r>
+              <a:t>Optical Canvas Capabilities</a:t>
+            </a:r>
+          </a:p>
+          <a:p>
+            <a:pPr>
+              <a:spcAft>
+                <a:spcPts val="400"/>
+              </a:spcAft>
+              <a:defRPr sz="1100">
+                <a:solidFill>
+                  <a:srgbClr val="F8FAFC"/>
+                </a:solidFill>
+              </a:defRPr>
+            </a:pPr>
+            <a:r>
+              <a:t>• Simulates realistic aggregate asphalt texture with randomized mineral distribution.</a:t>
+            </a:r>
+          </a:p>
+          <a:p>
+            <a:pPr>
+              <a:spcAft>
+                <a:spcPts val="400"/>
+              </a:spcAft>
+              <a:defRPr sz="1100">
+                <a:solidFill>
+                  <a:srgbClr val="F8FAFC"/>
+                </a:solidFill>
+              </a:defRPr>
+            </a:pPr>
+            <a:r>
+              <a:t>• Dynamic high-contrast crimson crack segmentation overlays indicating distress geometry.</a:t>
+            </a:r>
+          </a:p>
+          <a:p>
+            <a:pPr>
+              <a:spcAft>
+                <a:spcPts val="400"/>
+              </a:spcAft>
+              <a:defRPr sz="1100">
+                <a:solidFill>
+                  <a:srgbClr val="F8FAFC"/>
+                </a:solidFill>
+              </a:defRPr>
+            </a:pPr>
+            <a:r>
+              <a:t>• Animated amber laser radar scanline showing active 50 Hz optical survey pass.</a:t>
+            </a:r>
+          </a:p>
+          <a:p>
+            <a:pPr>
+              <a:spcAft>
+                <a:spcPts val="400"/>
+              </a:spcAft>
+              <a:defRPr sz="1100">
+                <a:solidFill>
+                  <a:srgbClr val="F8FAFC"/>
+                </a:solidFill>
+              </a:defRPr>
+            </a:pPr>
+            <a:r>
+              <a:t>• Live chainage marker HUD overlay displaying current roadway kilometer coordinate.</a:t>
+            </a:r>
+          </a:p>
+          <a:p>
+            <a:pPr>
+              <a:spcAft>
+                <a:spcPts val="400"/>
+              </a:spcAft>
+              <a:defRPr sz="1100">
+                <a:solidFill>
+                  <a:srgbClr val="F8FAFC"/>
+                </a:solidFill>
+              </a:defRPr>
+            </a:pPr>
+            <a:r>
+              <a:t>• Responsive canvas automatically adjusts to full viewport width across mobile and desktop.</a:t>
             </a:r>
           </a:p>
         </p:txBody>
